--- a/slides/ModuleF_WebServices_WoT_EN.pptx
+++ b/slides/ModuleF_WebServices_WoT_EN.pptx
@@ -6,7 +6,7 @@
   </p:sldMasterIdLst>
   <p:sldIdLst>
     <p:sldId id="256" r:id="rId7"/>
-    <p:sldId id="257" r:id="rId8"/>
+    <p:sldId id="257" r:id="rId9"/>
     <p:sldId id="258" r:id="rId10"/>
     <p:sldId id="259" r:id="rId11"/>
     <p:sldId id="260" r:id="rId12"/>
@@ -549,7 +549,31 @@
           <a:lstStyle/>
           <a:p>
             <a:r>
-              <a:t>[EXT] 35 min</a:t>
+              <a:t>Welcome. In this module we will work through Module F — Web Services, WSTUN &amp; WoT.</a:t>
+            </a:r>
+          </a:p>
+          <a:p/>
+          <a:p>
+            <a:r>
+              <a:t>Ch.6 + Ch.14 · Extension · VM {{VM_IP}}</a:t>
+            </a:r>
+          </a:p>
+          <a:p/>
+          <a:p>
+            <a:r>
+              <a:t>The session alternates theory from the book with live exercises on the Stack4Things lab VM. Replace the placeholder IP with the address of the machine you are using.</a:t>
+            </a:r>
+          </a:p>
+          <a:p/>
+          <a:p>
+            <a:r>
+              <a:t>Extension · Ch.6 + Ch.14 — Web Services, WSTUN &amp; WoT · book :8080 vs lab :50000.</a:t>
+            </a:r>
+          </a:p>
+          <a:p/>
+          <a:p>
+            <a:r>
+              <a:t>When you're ready, advance to the first section.</a:t>
             </a:r>
           </a:p>
         </p:txBody>
@@ -619,7 +643,31 @@
           <a:lstStyle/>
           <a:p>
             <a:r>
-              <a:t>[EXT] 35 min</a:t>
+              <a:t>In this slide we cover Direct vs gateway vs virtual-node WoT patterns (Ch.6). This material is covered in Ch.6 · three WoT integration patterns.</a:t>
+            </a:r>
+          </a:p>
+          <a:p/>
+          <a:p>
+            <a:r>
+              <a:t>First, regarding direct, sensor board runs HTTP server — reachable if public IP (rare in IoT). Next, regarding gateway, LR aggregates multiple sensors, then single REST API surface (most common S4T).</a:t>
+            </a:r>
+          </a:p>
+          <a:p/>
+          <a:p>
+            <a:r>
+              <a:t>By contrast, regarding virtual node, cloud-side software representation with same REST contract as physical board. We should also consider that S4T supports all three; Ch.14 web services focus on gateway pattern with DNS/WSTUN.</a:t>
+            </a:r>
+          </a:p>
+          <a:p/>
+          <a:p>
+            <a:r>
+              <a:t>Another key point is that regarding book weather station, gateway pattern — Flask on board, exposed via cloud proxy. Furthermore, regarding lab nginx demo, gateway pattern — nginx in LR container, exposed via WSTUN tunnel.</a:t>
+            </a:r>
+          </a:p>
+          <a:p/>
+          <a:p>
+            <a:r>
+              <a:t>I'll pause here for questions, then we'll continue.</a:t>
             </a:r>
           </a:p>
         </p:txBody>
@@ -689,7 +737,7 @@
           <a:lstStyle/>
           <a:p>
             <a:r>
-              <a:t>[EXT] 35 min</a:t>
+              <a:t>We now begin a new section: S4T Web Services (Ch.14 §14.3). Designate + WSTUN + service catalog. In the next slides, listen for whether we are in theory mode or hands-on mode, and open your terminal when the slides turn to lab work.</a:t>
             </a:r>
           </a:p>
         </p:txBody>
@@ -759,7 +807,31 @@
           <a:lstStyle/>
           <a:p>
             <a:r>
-              <a:t>[EXT] 35 min</a:t>
+              <a:t>In this slide we cover Stack4Things Web Services overview (Ch.14 §14.3). This material is covered in Ch.14 §14.3 · Web services integration · abstract.</a:t>
+            </a:r>
+          </a:p>
+          <a:p/>
+          <a:p>
+            <a:r>
+              <a:t>First, Expose IoT resources over the Web without manual port forwarding on edge routers. Next, Designate DNS-as-a-Service assigns subdomain per board (wot.board-1.example.com).</a:t>
+            </a:r>
+          </a:p>
+          <a:p/>
+          <a:p>
+            <a:r>
+              <a:t>By contrast, NGINX reverse proxy + WebSocket tunnel routes HTTPS to edge HTTP service. We should also consider that regarding iotronic service catalog, define reusable service templates (name + port + protocol).</a:t>
+            </a:r>
+          </a:p>
+          <a:p/>
+          <a:p>
+            <a:r>
+              <a:t>Another key point is that ServiceEnable action on board activates tunnel — cloud assigns public endpoint. Furthermore, regarding book repo, ch14/demos/weather_web_server.py — canonical WoT weather station on :8080.</a:t>
+            </a:r>
+          </a:p>
+          <a:p/>
+          <a:p>
+            <a:r>
+              <a:t>I'll pause here for questions, then we'll continue.</a:t>
             </a:r>
           </a:p>
         </p:txBody>
@@ -829,7 +901,31 @@
           <a:lstStyle/>
           <a:p>
             <a:r>
-              <a:t>[EXT] 35 min</a:t>
+              <a:t>In this slide we cover Web Services Manager workflow (Ch.14). This material is covered in Ch.14 · Web Services Manager · fig:chap14:wot-manager.</a:t>
+            </a:r>
+          </a:p>
+          <a:p/>
+          <a:p>
+            <a:r>
+              <a:t>First, Horizon Web Services panel, then enable WSM per board, then configure subdomain. Next, regarding service catalog entry, name (e.g. wot) + local port (8080 in book weather demo).</a:t>
+            </a:r>
+          </a:p>
+          <a:p/>
+          <a:p>
+            <a:r>
+              <a:t>By contrast, regarding public url, https://wot.board-1.example.com (Designate A record + NGINX location block). We should also consider that Exposes sensor GET endpoints + actuator POST (temperature, humidity, LED toggle).</a:t>
+            </a:r>
+          </a:p>
+          <a:p/>
+          <a:p>
+            <a:r>
+              <a:t>Another key point is that regarding book figures, fig:chap14:wot-manager, fig:chap14:wot-example. Furthermore, Full path requires Designate + NGINX + valid DNS zone — optional in Docker lab.</a:t>
+            </a:r>
+          </a:p>
+          <a:p/>
+          <a:p>
+            <a:r>
+              <a:t>I'll pause here for questions, then we'll continue.</a:t>
             </a:r>
           </a:p>
         </p:txBody>
@@ -899,7 +995,31 @@
           <a:lstStyle/>
           <a:p>
             <a:r>
-              <a:t>[EXT] 35 min</a:t>
+              <a:t>In this slide we cover Book weather server — weather_web_server.py (Ch.14). This material is covered in Ch.14 demos/weather_web_server.py · listing weather endpoints.</a:t>
+            </a:r>
+          </a:p>
+          <a:p/>
+          <a:p>
+            <a:r>
+              <a:t>First, Flask app on board port 8080 — GET /temperature, /humidity, POST /led. Next, Simulated or real sensor reads — returns JSON for programmatic access.</a:t>
+            </a:r>
+          </a:p>
+          <a:p/>
+          <a:p>
+            <a:r>
+              <a:t>By contrast, Represents canonical WoT gateway service in book hands-on walkthrough. We should also consider that regarding service catalog entry, name=wot, port=8080, protocol=TCP.</a:t>
+            </a:r>
+          </a:p>
+          <a:p/>
+          <a:p>
+            <a:r>
+              <a:t>Another key point is that regarding after serviceenable, public URL or WSTUN port maps to board :8080. Furthermore, Students should understand this as the production-intent service (vs lab nginx shortcut).</a:t>
+            </a:r>
+          </a:p>
+          <a:p/>
+          <a:p>
+            <a:r>
+              <a:t>I'll pause here for questions, then we'll continue.</a:t>
             </a:r>
           </a:p>
         </p:txBody>
@@ -969,7 +1089,31 @@
           <a:lstStyle/>
           <a:p>
             <a:r>
-              <a:t>[EXT] 35 min</a:t>
+              <a:t>In this slide we cover WSTUN — lab alternative to full Designate (Ch.13–14). This material is covered in Ch.13 WSTUN · Ch.16 MACM WSTUNServer · docker-compose.</a:t>
+            </a:r>
+          </a:p>
+          <a:p/>
+          <a:p>
+            <a:r>
+              <a:t>First, WSTUN Server (iotronic-wstun) manages reverse WebSocket tunnels to NAT-bound boards. Next, regarding service catalog, define service name + local TCP port on board (lab: 50000).</a:t>
+            </a:r>
+          </a:p>
+          <a:p/>
+          <a:p>
+            <a:r>
+              <a:t>By contrast, ServiceEnable on board, then cloud assigns public_port from range 50001–50100. We should also consider that regarding lab access, http://{{VM_IP}}:&lt;public_port&gt;/ — no DNS registration required.</a:t>
+            </a:r>
+          </a:p>
+          <a:p/>
+          <a:p>
+            <a:r>
+              <a:t>Another key point is that Same IoTronic API workflow as production — only the public endpoint format differs. Furthermore, Book Ch.16 MACM documents WSTUNServer component architecture.</a:t>
+            </a:r>
+          </a:p>
+          <a:p/>
+          <a:p>
+            <a:r>
+              <a:t>I'll pause here for questions, then we'll continue.</a:t>
             </a:r>
           </a:p>
         </p:txBody>
@@ -1039,7 +1183,31 @@
           <a:lstStyle/>
           <a:p>
             <a:r>
-              <a:t>[EXT] 35 min</a:t>
+              <a:t>In this slide we cover Book :8080 vs lab ports — verified divergence. This material is covered in Ch.14 demos/weather_web_server.py · run-weather-demo.sh.</a:t>
+            </a:r>
+          </a:p>
+          <a:p/>
+          <a:p>
+            <a:r>
+              <a:t>First, regarding book (ch.14), weather_web_server.py on port 8080 — GET /sensors, POST /led/toggle. Next, regarding lr compose image reserves, 8080 internally — lab runs weather on port 8088 instead.</a:t>
+            </a:r>
+          </a:p>
+          <a:p/>
+          <a:p>
+            <a:r>
+              <a:t>By contrast, regarding lab infra smoke test, lr-nginx-demo on port 50000, then WSTUN public_port (e.g. 50002). We should also consider that regarding book wot demo verified, weather-wot service on lab port 8088, then WSTUN :50062, then HTTP 200 /sensors.</a:t>
+            </a:r>
+          </a:p>
+          <a:p/>
+          <a:p>
+            <a:r>
+              <a:t>Another key point is that regarding both demos use identical iotronic workflow, catalog, then ServiceEnable, then curl public endpoint. Furthermore, regarding repo, github.com/AssemblingSmartCPS/ch14 · demos/weather_web_server.py.</a:t>
+            </a:r>
+          </a:p>
+          <a:p/>
+          <a:p>
+            <a:r>
+              <a:t>I'll pause here for questions, then we'll continue.</a:t>
             </a:r>
           </a:p>
         </p:txBody>
@@ -1109,7 +1277,7 @@
           <a:lstStyle/>
           <a:p>
             <a:r>
-              <a:t>[EXT] 35 min</a:t>
+              <a:t>Please look at the diagram on screen: WSTUN port forwarding architecture. Describe the main boxes and arrows. Relate each element to a Docker service or API you have already seen. In particular, note the following: Edge service → WSTUN tunnel → cloud public_port (50001–50100 range). Take a few seconds to orient before we continue.</a:t>
             </a:r>
           </a:p>
         </p:txBody>
@@ -1179,7 +1347,7 @@
           <a:lstStyle/>
           <a:p>
             <a:r>
-              <a:t>[EXT] 35 min</a:t>
+              <a:t>Please look at the sequence diagram on screen: UML sequence — ServiceEnable / WSTUN (Module F). Trace the diagram from left to right. Name each actor, the protocol used, and the message that crosses the cloud–edge boundary. In particular, note the following: Catalog → ServiceEnable → WSTUN tunnel → curl public_port/sensors. Take a few seconds to orient before we continue.</a:t>
             </a:r>
           </a:p>
         </p:txBody>
@@ -1249,7 +1417,31 @@
           <a:lstStyle/>
           <a:p>
             <a:r>
-              <a:t>[EXT] 35 min</a:t>
+              <a:t>On this slide, Module F — learning objectives.</a:t>
+            </a:r>
+          </a:p>
+          <a:p/>
+          <a:p>
+            <a:r>
+              <a:t>First, Explain Ch.6 WoT layered model and Ch.14 web services architecture. Next, Run book weather demo via run-weather-demo.sh (port 8088 lab / 8080 book).</a:t>
+            </a:r>
+          </a:p>
+          <a:p/>
+          <a:p>
+            <a:r>
+              <a:t>By contrast, Run nginx infra smoke test via setup-wstun-demo.py (port 50000). We should also consider that Execute ServiceEnable on Active board — obtain public_port mapping.</a:t>
+            </a:r>
+          </a:p>
+          <a:p/>
+          <a:p>
+            <a:r>
+              <a:t>Another key point is that Curl /sensors JSON from weather tunnel and HTTP 200 from nginx tunnel.</a:t>
+            </a:r>
+          </a:p>
+          <a:p/>
+          <a:p>
+            <a:r>
+              <a:t>If these objectives are clear, we can proceed.</a:t>
             </a:r>
           </a:p>
         </p:txBody>
@@ -1319,7 +1511,7 @@
           <a:lstStyle/>
           <a:p>
             <a:r>
-              <a:t>[EXT] 35 min</a:t>
+              <a:t>We now begin a new section: Web of Things theory. Ch.6 — layered model before the WSTUN demo. In the next slides, listen for whether we are in theory mode or hands-on mode, and open your terminal when the slides turn to lab work.</a:t>
             </a:r>
           </a:p>
         </p:txBody>
@@ -1389,7 +1581,37 @@
           <a:lstStyle/>
           <a:p>
             <a:r>
-              <a:t>[EXT] 35 min</a:t>
+              <a:t>In this demonstration, Demo A — Book weather server (ch14) — verified.</a:t>
+            </a:r>
+          </a:p>
+          <a:p/>
+          <a:p>
+            <a:r>
+              <a:t>First, regarding script, experiments/webservices/run-weather-demo.sh. Next, Starts weather_web_server.py inside LR on lab port 8088 (book uses 8080 on hardware).</a:t>
+            </a:r>
+          </a:p>
+          <a:p/>
+          <a:p>
+            <a:r>
+              <a:t>By contrast, Creates catalog entry weather-wot · ServiceEnable, then public_port (verified :50062). We should also consider that regarding success, curl http://{{VM_IP}}:&lt;public_port&gt;/sensors, then JSON temperature/humidity.</a:t>
+            </a:r>
+          </a:p>
+          <a:p/>
+          <a:p>
+            <a:r>
+              <a:t>Another key point is that regarding screenshot, assets/chapter14/weather-server-dashboard.png. Furthermore, regarding state file, experiments/webservices/weather-state.json.</a:t>
+            </a:r>
+          </a:p>
+          <a:p/>
+          <a:p>
+            <a:r>
+              <a:t>Check that your screen matches what we showed before moving on.</a:t>
+            </a:r>
+          </a:p>
+          <a:p/>
+          <a:p>
+            <a:r>
+              <a:t>Session timing — Module F — 40-minute timeline:</a:t>
             </a:r>
           </a:p>
         </p:txBody>
@@ -1459,7 +1681,31 @@
           <a:lstStyle/>
           <a:p>
             <a:r>
-              <a:t>[EXT] 35 min</a:t>
+              <a:t>In this demonstration, Demo B — nginx infra smoke test — verified.</a:t>
+            </a:r>
+          </a:p>
+          <a:p/>
+          <a:p>
+            <a:r>
+              <a:t>First, regarding script, experiments/webservices/setup-wstun-demo.py. Next, Catalog lr-nginx-demo port 50000, then public_port (verified :50002), then HTTP 200.</a:t>
+            </a:r>
+          </a:p>
+          <a:p/>
+          <a:p>
+            <a:r>
+              <a:t>By contrast, Validates WSTUN tunnel plumbing without deploying Flask weather server. We should also consider that Use when time is short — weather demo proves full WoT API path.</a:t>
+            </a:r>
+          </a:p>
+          <a:p/>
+          <a:p>
+            <a:r>
+              <a:t>Another key point is that Both services can coexist on same board with different local ports.</a:t>
+            </a:r>
+          </a:p>
+          <a:p/>
+          <a:p>
+            <a:r>
+              <a:t>Check that your screen matches what we showed before moving on.</a:t>
             </a:r>
           </a:p>
         </p:txBody>
@@ -1529,7 +1775,31 @@
           <a:lstStyle/>
           <a:p>
             <a:r>
-              <a:t>[EXT] 35 min</a:t>
+              <a:t>On this slide, Lab stack — WSTUN component ports.</a:t>
+            </a:r>
+          </a:p>
+          <a:p/>
+          <a:p>
+            <a:r>
+              <a:t>First, regarding wstun control plane, iotronic-wstun container in docker compose stack. Next, regarding tunnel public range, host ports 50001–50100 mapped in lab overlay patch.</a:t>
+            </a:r>
+          </a:p>
+          <a:p/>
+          <a:p>
+            <a:r>
+              <a:t>By contrast, Requires board Active (Module A) + service catalog entry with valid port ≠ 0. We should also consider that regarding conductor api, http://{{VM_IP}}:8812 · Horizon: http://{{VM_IP}}/horizon/iot/.</a:t>
+            </a:r>
+          </a:p>
+          <a:p/>
+          <a:p>
+            <a:r>
+              <a:t>Another key point is that regarding horizon login, admin / s4t.</a:t>
+            </a:r>
+          </a:p>
+          <a:p/>
+          <a:p>
+            <a:r>
+              <a:t>If these objectives are clear, we can proceed.</a:t>
             </a:r>
           </a:p>
         </p:txBody>
@@ -1599,7 +1869,31 @@
           <a:lstStyle/>
           <a:p>
             <a:r>
-              <a:t>[EXT] 35 min</a:t>
+              <a:t>Before we continue, an important note about Horizon Create Service — Porta default is 0!.</a:t>
+            </a:r>
+          </a:p>
+          <a:p/>
+          <a:p>
+            <a:r>
+              <a:t>First, Form /horizon/iot/services/create/ defaults Porta = 0 — INVALID for any service. Next, You MUST set Porta = 50000 for lab nginx demo (LOCAL_PORT constant in this deck).</a:t>
+            </a:r>
+          </a:p>
+          <a:p/>
+          <a:p>
+            <a:r>
+              <a:t>By contrast, Book weather demo uses port 8080 — same form, different port value. We should also consider that Port 0 causes ServiceEnable failure or silent misconfiguration — always verify in list.</a:t>
+            </a:r>
+          </a:p>
+          <a:p/>
+          <a:p>
+            <a:r>
+              <a:t>Another key point is that regarding prefer api if ui unclear, POST /v1/services with explicit port field in JSON body. Furthermore, Setup-wstun-demo.py script automates catalog creation with correct port.</a:t>
+            </a:r>
+          </a:p>
+          <a:p/>
+          <a:p>
+            <a:r>
+              <a:t>Keep this difference in mind for the rest of the lab.</a:t>
             </a:r>
           </a:p>
         </p:txBody>
@@ -1669,7 +1963,13 @@
           <a:lstStyle/>
           <a:p>
             <a:r>
-              <a:t>[EXT] 6 min</a:t>
+              <a:t>We now begin a new section: Lab: Demo A: book weather server. run-weather-demo.sh. In the next slides, listen for whether we are in theory mode or hands-on mode, and open your terminal when the slides turn to lab work.</a:t>
+            </a:r>
+          </a:p>
+          <a:p/>
+          <a:p>
+            <a:r>
+              <a:t>Instructor timing (title): Hands-on — Demo A: book weather server</a:t>
             </a:r>
           </a:p>
         </p:txBody>
@@ -1739,7 +2039,37 @@
           <a:lstStyle/>
           <a:p>
             <a:r>
-              <a:t>[EXT] 35 min</a:t>
+              <a:t>Now we move to the hands-on part: Run verified weather demo script. Open your lab VM and follow along.</a:t>
+            </a:r>
+          </a:p>
+          <a:p/>
+          <a:p>
+            <a:r>
+              <a:t>Please run the following command on your VM: cd training. Wait until you see a sensible result before continuing. Please run the following command on your VM: ./experiments/webservices/run-weather-demo.sh. Wait until you see a sensible result before continuing.</a:t>
+            </a:r>
+          </a:p>
+          <a:p/>
+          <a:p>
+            <a:r>
+              <a:t>By contrast, # Starts ch14/demos/weather_web_server.py inside LR on port 8088. We should also consider that # Creates catalog weather-wot · ServiceEnable · writes weather-state.json.</a:t>
+            </a:r>
+          </a:p>
+          <a:p/>
+          <a:p>
+            <a:r>
+              <a:t>Another key point is that regarding expected, OK http://{{VM_IP}}:&lt;public_port&gt;/sensors, then HTTP 200.</a:t>
+            </a:r>
+          </a:p>
+          <a:p/>
+          <a:p>
+            <a:r>
+              <a:t>Raise your hand if you're stuck — we'll wait until most of you are done.</a:t>
+            </a:r>
+          </a:p>
+          <a:p/>
+          <a:p>
+            <a:r>
+              <a:t>Instructor timing (title): Step 1 — Run verified weather demo script</a:t>
             </a:r>
           </a:p>
         </p:txBody>
@@ -1809,7 +2139,7 @@
           <a:lstStyle/>
           <a:p>
             <a:r>
-              <a:t>[EXT] 6 min</a:t>
+              <a:t>Please look at the screenshot on screen: Weather server dashboard via WSTUN tunnel. Walk the class through what they see in the interface. Connect each panel and button to a component we already deployed in the stack. In particular, note the following: http://{{VM_IP}}:&lt;public_port&gt;/ — JSON /sensors from ch14 demo. Take a few seconds to orient before we continue.</a:t>
             </a:r>
           </a:p>
         </p:txBody>
@@ -1879,7 +2209,31 @@
           <a:lstStyle/>
           <a:p>
             <a:r>
-              <a:t>[EXT] 35 min</a:t>
+              <a:t>Now we move to the hands-on part: Verify WoT sensor API. Open your lab VM and follow along.</a:t>
+            </a:r>
+          </a:p>
+          <a:p/>
+          <a:p>
+            <a:r>
+              <a:t>Please run the following command on your VM: CLOUD=$(python3 -c "import json; print(json.load(open('experiments/webservices/weather-state.json'))['cloud_port'])"). Wait until you see a sensible result before continuing. Please run the following command on your VM: curl -s http://{{VM_IP}}:$CLOUD/sensors | python3 -m json.tool. Wait until you see a sensible result before continuing.</a:t>
+            </a:r>
+          </a:p>
+          <a:p/>
+          <a:p>
+            <a:r>
+              <a:t>By contrast, regarding expected fields, temperature, humidity, pressure, device=weather-station. Please run the following command on your VM: curl -X POST http://{{VM_IP}}:$CLOUD/led/toggle. Wait until you see a sensible result before continuing.</a:t>
+            </a:r>
+          </a:p>
+          <a:p/>
+          <a:p>
+            <a:r>
+              <a:t>Raise your hand if you're stuck — we'll wait until most of you are done.</a:t>
+            </a:r>
+          </a:p>
+          <a:p/>
+          <a:p>
+            <a:r>
+              <a:t>Instructor timing (title): Step 2 — Verify WoT sensor API</a:t>
             </a:r>
           </a:p>
         </p:txBody>
@@ -1949,7 +2303,13 @@
           <a:lstStyle/>
           <a:p>
             <a:r>
-              <a:t>[EXT] 6 min</a:t>
+              <a:t>We now begin a new section: Lab: Demo B: nginx infra smoke test. setup-wstun-demo.py. In the next slides, listen for whether we are in theory mode or hands-on mode, and open your terminal when the slides turn to lab work.</a:t>
+            </a:r>
+          </a:p>
+          <a:p/>
+          <a:p>
+            <a:r>
+              <a:t>Instructor timing (title): Hands-on — Demo B: nginx infra smoke test</a:t>
             </a:r>
           </a:p>
         </p:txBody>
@@ -2019,7 +2379,31 @@
           <a:lstStyle/>
           <a:p>
             <a:r>
-              <a:t>[EXT] 35 min</a:t>
+              <a:t>Now we move to the hands-on part: Run nginx WSTUN smoke test. Open your lab VM and follow along.</a:t>
+            </a:r>
+          </a:p>
+          <a:p/>
+          <a:p>
+            <a:r>
+              <a:t>Please run the following command on your VM: .venv/bin/python experiments/webservices/setup-wstun-demo.py. Wait until you see a sensible result before continuing. Next, Creates lr-nginx-demo port 50000 · captures Horizon screenshots.</a:t>
+            </a:r>
+          </a:p>
+          <a:p/>
+          <a:p>
+            <a:r>
+              <a:t>Please run the following command on your VM: curl -v http://{{VM_IP}}:50002/. Wait until you see a sensible result before continuing. We should also consider that regarding expected, HTTP 200 nginx welcome page.</a:t>
+            </a:r>
+          </a:p>
+          <a:p/>
+          <a:p>
+            <a:r>
+              <a:t>Raise your hand if you're stuck — we'll wait until most of you are done.</a:t>
+            </a:r>
+          </a:p>
+          <a:p/>
+          <a:p>
+            <a:r>
+              <a:t>Instructor timing (title): Step 3 — Run nginx WSTUN smoke test</a:t>
             </a:r>
           </a:p>
         </p:txBody>
@@ -2089,7 +2473,31 @@
           <a:lstStyle/>
           <a:p>
             <a:r>
-              <a:t>[EXT] 35 min</a:t>
+              <a:t>In this slide we cover Fragmented IoT and the need for abstraction (Ch.6). This material is covered in Ch.6 §6.1 · fragmented IoT · need for common abstraction.</a:t>
+            </a:r>
+          </a:p>
+          <a:p/>
+          <a:p>
+            <a:r>
+              <a:t>First, IoT devices use incompatible protocols — Zigbee, MQTT, CoAP, proprietary HTTP APIs. Next, Each vendor ships its own stack — integration requires custom middleware and data mapping.</a:t>
+            </a:r>
+          </a:p>
+          <a:p/>
+          <a:p>
+            <a:r>
+              <a:t>By contrast, regarding parallel to the pre-www internet, incompatible islands before HTTP unified access. We should also consider that WoT reuses HTTP, URIs, JSON, REST — decades of proven Web infrastructure and tooling.</a:t>
+            </a:r>
+          </a:p>
+          <a:p/>
+          <a:p>
+            <a:r>
+              <a:t>Another key point is that Common abstraction decouples application logic from board-specific SDKs and pin maps. Furthermore, S4T I/Ocloud + WoT gateway pattern is the book's answer to fragmentation at scale.</a:t>
+            </a:r>
+          </a:p>
+          <a:p/>
+          <a:p>
+            <a:r>
+              <a:t>I'll pause here for questions, then we'll continue.</a:t>
             </a:r>
           </a:p>
         </p:txBody>
@@ -2159,7 +2567,7 @@
           <a:lstStyle/>
           <a:p>
             <a:r>
-              <a:t>[EXT] 35 min</a:t>
+              <a:t>Please look at the screenshot on screen: Horizon — Servizi list (port verified). Walk the class through what they see in the interface. Connect each panel and button to a component we already deployed in the stack. In particular, note the following: http://{{VM_IP}}/horizon/iot/services/ — lr-nginx-demo port 50000. Take a few seconds to orient before we continue.</a:t>
             </a:r>
           </a:p>
         </p:txBody>
@@ -2229,12 +2637,31 @@
           <a:lstStyle/>
           <a:p>
             <a:r>
-              <a:t>[EXT] 35 min</a:t>
-            </a:r>
-          </a:p>
-          <a:p>
-            <a:r>
-              <a:t>Response JSON includes public_port on iotronic-wstun (e.g. 50002)</a:t>
+              <a:t>In this slide we cover Service catalog REST schema (Ch.14). This material is covered in Ch.14 · IoTronic services API · listing create_service.</a:t>
+            </a:r>
+          </a:p>
+          <a:p/>
+          <a:p>
+            <a:r>
+              <a:t>First, regarding post /v1/services — body, name (string), port (integer), protocol (TCP|UDP). Next, GET /v1/services/ — list all catalog entries with UUID and port fields.</a:t>
+            </a:r>
+          </a:p>
+          <a:p/>
+          <a:p>
+            <a:r>
+              <a:t>By contrast, Catalog is tenant-global — same service definition reused across multiple boards. We should also consider that ServiceEnable on board creates board-specific tunnel instance with public_port.</a:t>
+            </a:r>
+          </a:p>
+          <a:p/>
+          <a:p>
+            <a:r>
+              <a:t>Another key point is that DELETE /v1/services/{uuid} — remove catalog entry (boards must disable first). Furthermore, Port must match actual listening port inside LR container (50000 nginx / 8080 Flask).</a:t>
+            </a:r>
+          </a:p>
+          <a:p/>
+          <a:p>
+            <a:r>
+              <a:t>I'll pause here for questions, then we'll continue.</a:t>
             </a:r>
           </a:p>
         </p:txBody>
@@ -2304,7 +2731,31 @@
           <a:lstStyle/>
           <a:p>
             <a:r>
-              <a:t>[EXT] 35 min</a:t>
+              <a:t>On this slide we walk through the code for ServiceEnable on board (API).</a:t>
+            </a:r>
+          </a:p>
+          <a:p/>
+          <a:p>
+            <a:r>
+              <a:t>Scroll slowly through the listing on screen while I explain each part.</a:t>
+            </a:r>
+          </a:p>
+          <a:p/>
+          <a:p>
+            <a:r>
+              <a:t>Point out the imports, the class definition, and the run method. Students will adapt this template in the lab rather than writing from scratch.</a:t>
+            </a:r>
+          </a:p>
+          <a:p/>
+          <a:p>
+            <a:r>
+              <a:t>After reviewing the code, we'll apply it in the practical exercise.</a:t>
+            </a:r>
+          </a:p>
+          <a:p/>
+          <a:p>
+            <a:r>
+              <a:t>Instructor timing (title): Step 2 — ServiceEnable on board (API)</a:t>
             </a:r>
           </a:p>
         </p:txBody>
@@ -2374,7 +2825,7 @@
           <a:lstStyle/>
           <a:p>
             <a:r>
-              <a:t>[EXT] 35 min</a:t>
+              <a:t>Please look at the screenshot on screen: Horizon — Boards with exposed service. Walk the class through what they see in the interface. Connect each panel and button to a component we already deployed in the stack. In particular, note the following: Servizi column: lr-nginx-demo [TCP] 50000 → 50002. Take a few seconds to orient before we continue.</a:t>
             </a:r>
           </a:p>
         </p:txBody>
@@ -2444,7 +2895,31 @@
           <a:lstStyle/>
           <a:p>
             <a:r>
-              <a:t>[EXT] 6 min</a:t>
+              <a:t>In this slide we cover ServiceEnable response and port mapping (Ch.14). This material is covered in Ch.14 · ServiceEnable · WSTUN port allocation.</a:t>
+            </a:r>
+          </a:p>
+          <a:p/>
+          <a:p>
+            <a:r>
+              <a:t>First, regarding response public_port, host-accessible port on lab VM (50001–50100 range). Next, regarding board column in horizon shows, service_name [protocol] local_port, then public_port.</a:t>
+            </a:r>
+          </a:p>
+          <a:p/>
+          <a:p>
+            <a:r>
+              <a:t>By contrast, regarding traffic flow, client, then {{VM_IP}}:public_port, then WSTUN, then LR:local_port. We should also consider that LR nginx (lab) or Flask (book) must be listening BEFORE ServiceEnable.</a:t>
+            </a:r>
+          </a:p>
+          <a:p/>
+          <a:p>
+            <a:r>
+              <a:t>Another key point is that ServiceDisable action tears down tunnel — public_port returned to pool. Furthermore, regarding multiple services on same board, separate catalog entries with different local ports.</a:t>
+            </a:r>
+          </a:p>
+          <a:p/>
+          <a:p>
+            <a:r>
+              <a:t>I'll pause here for questions, then we'll continue.</a:t>
             </a:r>
           </a:p>
         </p:txBody>
@@ -2514,7 +2989,31 @@
           <a:lstStyle/>
           <a:p>
             <a:r>
-              <a:t>[EXT] 6 min</a:t>
+              <a:t>Now we move to the hands-on part: Verify cloud endpoint with curl. Open your lab VM and follow along.</a:t>
+            </a:r>
+          </a:p>
+          <a:p/>
+          <a:p>
+            <a:r>
+              <a:t>Please run the following command on your VM: curl -v http://{{VM_IP}}:50002/. Wait until you see a sensible result before continuing. Next, # nginx demo public_port — check wstun-state.json if different.</a:t>
+            </a:r>
+          </a:p>
+          <a:p/>
+          <a:p>
+            <a:r>
+              <a:t>By contrast, regarding expected, HTTP 200 + nginx welcome page from board LR container. Please run the following command on your VM: ./validate/validate-demo-ch14.sh &amp;&amp; ./validate-lab-wstun.sh. Wait until you see a sensible result before continuing.</a:t>
+            </a:r>
+          </a:p>
+          <a:p/>
+          <a:p>
+            <a:r>
+              <a:t>Raise your hand if you're stuck — we'll wait until most of you are done.</a:t>
+            </a:r>
+          </a:p>
+          <a:p/>
+          <a:p>
+            <a:r>
+              <a:t>Instructor timing (title): Step 4 — Verify cloud endpoint with curl</a:t>
             </a:r>
           </a:p>
         </p:txBody>
@@ -2584,7 +3083,31 @@
           <a:lstStyle/>
           <a:p>
             <a:r>
-              <a:t>[EXT] 35 min</a:t>
+              <a:t>Now we move to the hands-on part: WSTUN troubleshooting logs. Open your lab VM and follow along.</a:t>
+            </a:r>
+          </a:p>
+          <a:p/>
+          <a:p>
+            <a:r>
+              <a:t>Please run the following command on your VM: docker logs iotronic-wstun 2&gt;&amp;1 | tail -20. Wait until you see a sensible result before continuing. Please run the following command on your VM: docker logs lightning-rod 2&gt;&amp;1 | grep -i 'Cloud service'. Wait until you see a sensible result before continuing.</a:t>
+            </a:r>
+          </a:p>
+          <a:p/>
+          <a:p>
+            <a:r>
+              <a:t>By contrast, regarding look for, TCP server listening on assigned public port. We should also consider that regarding common fix, recreate catalog entry if port was 0.</a:t>
+            </a:r>
+          </a:p>
+          <a:p/>
+          <a:p>
+            <a:r>
+              <a:t>Raise your hand if you're stuck — we'll wait until most of you are done.</a:t>
+            </a:r>
+          </a:p>
+          <a:p/>
+          <a:p>
+            <a:r>
+              <a:t>Instructor timing (title): Step 5 — WSTUN troubleshooting logs</a:t>
             </a:r>
           </a:p>
         </p:txBody>
@@ -2654,7 +3177,31 @@
           <a:lstStyle/>
           <a:p>
             <a:r>
-              <a:t>[EXT] 35 min</a:t>
+              <a:t>In this slide we cover Book weather server — verified lab procedure (Ch.14). This material is covered in Ch.14 demos/weather_web_server.py · weather-state.json.</a:t>
+            </a:r>
+          </a:p>
+          <a:p/>
+          <a:p>
+            <a:r>
+              <a:t>First, Script run-weather-demo.sh copies ch14/demos/weather_web_server.py into LR container. Next, Lab port 8088 used because LR compose image reserves :8080 for WSTUN client stack.</a:t>
+            </a:r>
+          </a:p>
+          <a:p/>
+          <a:p>
+            <a:r>
+              <a:t>By contrast, Catalog entry weather-wot port 8088 · ServiceEnable, then curl /sensors JSON via public_port. We should also consider that regarding verified, HTTP 200 on /sensors with temperature, humidity, pressure fields.</a:t>
+            </a:r>
+          </a:p>
+          <a:p/>
+          <a:p>
+            <a:r>
+              <a:t>Another key point is that Book hardware boards use port 8080 as documented in ch14/demos/README.md. Furthermore, regarding repo, github.com/AssemblingSmartCPS/ch14.</a:t>
+            </a:r>
+          </a:p>
+          <a:p/>
+          <a:p>
+            <a:r>
+              <a:t>I'll pause here for questions, then we'll continue.</a:t>
             </a:r>
           </a:p>
         </p:txBody>
@@ -2724,7 +3271,7 @@
           <a:lstStyle/>
           <a:p>
             <a:r>
-              <a:t>[EXT] 35 min</a:t>
+              <a:t>Please look at the screenshot on screen: Horizon — Web Services panel (Designate path). Walk the class through what they see in the interface. Connect each panel and button to a component we already deployed in the stack. In particular, note the following: http://{{VM_IP}}/horizon/iot/webservices/ — full WoT URL setup (optional tour). Take a few seconds to orient before we continue.</a:t>
             </a:r>
           </a:p>
         </p:txBody>
@@ -2794,7 +3341,31 @@
           <a:lstStyle/>
           <a:p>
             <a:r>
-              <a:t>[EXT] 35 min</a:t>
+              <a:t>In this slide we cover Production WoT path — Designate + /etc/hosts (Ch.14). This material is covered in Ch.14 · local domain simulation · Designate integration.</a:t>
+            </a:r>
+          </a:p>
+          <a:p/>
+          <a:p>
+            <a:r>
+              <a:t>First, Install/configure OpenStack Designate with public domain zone (example.com). Next, regarding testing without real dns, map example.com, then {{VM_IP}} in /etc/hosts on client machine.</a:t>
+            </a:r>
+          </a:p>
+          <a:p/>
+          <a:p>
+            <a:r>
+              <a:t>By contrast, regarding enable wsm → service wot, 8080, then https://wot.board-1.example.com/temperature. We should also consider that NGINX terminates TLS — forwards to WSTUN tunnel — same machinery as port mapping.</a:t>
+            </a:r>
+          </a:p>
+          <a:p/>
+          <a:p>
+            <a:r>
+              <a:t>Another key point is that Human-readable URLs enable WoT Find/Share layers (Ch.6) at scale. Furthermore, Designate optional in Docker lab — WSTUN port path sufficient for training objectives.</a:t>
+            </a:r>
+          </a:p>
+          <a:p/>
+          <a:p>
+            <a:r>
+              <a:t>I'll pause here for questions, then we'll continue.</a:t>
             </a:r>
           </a:p>
         </p:txBody>
@@ -2864,7 +3435,31 @@
           <a:lstStyle/>
           <a:p>
             <a:r>
-              <a:t>[EXT] 35 min</a:t>
+              <a:t>In this slide we cover Web of Things paradigm (Ch.6). This material is covered in Ch.6 · Weaving the Web of Things · chapter abstract.</a:t>
+            </a:r>
+          </a:p>
+          <a:p/>
+          <a:p>
+            <a:r>
+              <a:t>First, Extend Web standards (HTTP, URIs, JSON, HTML) to physical objects and sensors. Next, regarding web things expose restful apis, readable properties, invokable actions, events.</a:t>
+            </a:r>
+          </a:p>
+          <a:p/>
+          <a:p>
+            <a:r>
+              <a:t>By contrast, regarding three integration patterns, direct API on device, smart gateway, I/Ocloud virtual nodes. We should also consider that regarding goal, interoperable IoT at Web scale — not proprietary silo protocols (MQTT-only, etc.).</a:t>
+            </a:r>
+          </a:p>
+          <a:p/>
+          <a:p>
+            <a:r>
+              <a:t>Another key point is that regarding wot aligns with i/ocloud vision (ch.4), programmable CPS as Web-accessible infrastructure. Furthermore, Module I (Ch.7 Deviceless) builds on WoT exposure patterns introduced here.</a:t>
+            </a:r>
+          </a:p>
+          <a:p/>
+          <a:p>
+            <a:r>
+              <a:t>I'll pause here for questions, then we'll continue.</a:t>
             </a:r>
           </a:p>
         </p:txBody>
@@ -2934,7 +3529,31 @@
           <a:lstStyle/>
           <a:p>
             <a:r>
-              <a:t>[EXT] 35 min</a:t>
+              <a:t>In this slide we cover WoT security considerations (Ch.6 + Ch.14). This material is covered in Ch.6 · Ch.14 security notes.</a:t>
+            </a:r>
+          </a:p>
+          <a:p/>
+          <a:p>
+            <a:r>
+              <a:t>First, HTTPS at cloud edge — never expose raw board HTTP to public Internet in production. Next, Keystone authentication for IoTronic API — ServiceEnable requires valid token.</a:t>
+            </a:r>
+          </a:p>
+          <a:p/>
+          <a:p>
+            <a:r>
+              <a:t>By contrast, Board services should validate input on POST actuators (LED, GPIO) — prevent abuse. We should also consider that Rate limiting at NGINX for public WSTUN endpoints under DDoS exposure.</a:t>
+            </a:r>
+          </a:p>
+          <a:p/>
+          <a:p>
+            <a:r>
+              <a:t>Another key point is that regarding lab, HTTP acceptable on {{VM_IP}}:public_port for classroom — not production pattern. Furthermore, Cross-reference Module E VN for network-layer security groups on overlay.</a:t>
+            </a:r>
+          </a:p>
+          <a:p/>
+          <a:p>
+            <a:r>
+              <a:t>I'll pause here for questions, then we'll continue.</a:t>
             </a:r>
           </a:p>
         </p:txBody>
@@ -3004,7 +3623,31 @@
           <a:lstStyle/>
           <a:p>
             <a:r>
-              <a:t>[EXT] 35 min</a:t>
+              <a:t>In this slide we cover REST design for WoT resources (Ch.6 + Ch.14). This material is covered in Ch.6 RESTful Things · Ch.14 weather_web_server.py endpoints.</a:t>
+            </a:r>
+          </a:p>
+          <a:p/>
+          <a:p>
+            <a:r>
+              <a:t>First, GET /temperature — read sensor property; idempotent, cacheable, safe method. Next, POST /led — actuate actuator with JSON body {"state": "on"} — non-idempotent action.</a:t>
+            </a:r>
+          </a:p>
+          <a:p/>
+          <a:p>
+            <a:r>
+              <a:t>By contrast, regarding content-type, application/json for machine clients; text/html optional for dashboards. We should also consider that regarding http status codes, 200 OK read, 201 Created action, 503 if sensor temporarily unavailable.</a:t>
+            </a:r>
+          </a:p>
+          <a:p/>
+          <a:p>
+            <a:r>
+              <a:t>Another key point is that regarding book weather server returns json, {"temperature": 22.5, "unit": "C"} — WoT property pattern. Furthermore, Lab nginx returns HTML welcome page — infra validation only; weather server is true WoT API.</a:t>
+            </a:r>
+          </a:p>
+          <a:p/>
+          <a:p>
+            <a:r>
+              <a:t>I'll pause here for questions, then we'll continue.</a:t>
             </a:r>
           </a:p>
         </p:txBody>
@@ -3074,7 +3717,31 @@
           <a:lstStyle/>
           <a:p>
             <a:r>
-              <a:t>[EXT] 35 min</a:t>
+              <a:t>In this slide we cover NGINX reverse proxy role in S4T WoT (Ch.6 §6.4 + Ch.14). This material is covered in Ch.6 §6.4 gateway architecture · Ch.14 NGINX integration.</a:t>
+            </a:r>
+          </a:p>
+          <a:p/>
+          <a:p>
+            <a:r>
+              <a:t>First, Cloud NGINX terminates TLS and routes Host header to correct board tunnel backend. Next, regarding location block per subdomain, wot.board-1.example.com, then upstream WSTUN backend port.</a:t>
+            </a:r>
+          </a:p>
+          <a:p/>
+          <a:p>
+            <a:r>
+              <a:t>By contrast, regarding board-side nginx (lab, 50000) or Flask (:8080) is origin server — NGINX is edge proxy. We should also consider that WebSocket upgrade headers preserved for WSTUN tunnel establishment and maintenance.</a:t>
+            </a:r>
+          </a:p>
+          <a:p/>
+          <a:p>
+            <a:r>
+              <a:t>Another key point is that Same NGINX instance serves Horizon UI and IoT service proxy — different server_name blocks. Furthermore, regarding production, NGINX + Designate + WSTUN three-component path to Deviceless URL (Module I).</a:t>
+            </a:r>
+          </a:p>
+          <a:p/>
+          <a:p>
+            <a:r>
+              <a:t>I'll pause here for questions, then we'll continue.</a:t>
             </a:r>
           </a:p>
         </p:txBody>
@@ -3144,7 +3811,31 @@
           <a:lstStyle/>
           <a:p>
             <a:r>
-              <a:t>[EXT] 35 min</a:t>
+              <a:t>In this slide we cover Thing Descriptions and discovery (Ch.6 Find layer). This material is covered in Ch.6 · Find layer · Thing Description W3C WoT spec cross-reference.</a:t>
+            </a:r>
+          </a:p>
+          <a:p/>
+          <a:p>
+            <a:r>
+              <a:t>First, regarding wot thing description (td), JSON-LD document listing properties, actions, events, schemas. Next, regarding well-known uri, /.well-known/wot-thing-description — automated discovery by mashup apps.</a:t>
+            </a:r>
+          </a:p>
+          <a:p/>
+          <a:p>
+            <a:r>
+              <a:t>By contrast, CoRE Link Format alternative for constrained devices — Link header in HTTP responses. We should also consider that regarding s4t designate dns enables stable td url, https://wot.board.example.com/td.</a:t>
+            </a:r>
+          </a:p>
+          <a:p/>
+          <a:p>
+            <a:r>
+              <a:t>Another key point is that regarding find layer completes access, clients discover API contract before invoking endpoints. Furthermore, Lab WSTUN path skips Find (no DNS) — students should know production adds TD + DNS.</a:t>
+            </a:r>
+          </a:p>
+          <a:p/>
+          <a:p>
+            <a:r>
+              <a:t>I'll pause here for questions, then we'll continue.</a:t>
             </a:r>
           </a:p>
         </p:txBody>
@@ -3214,7 +3905,31 @@
           <a:lstStyle/>
           <a:p>
             <a:r>
-              <a:t>[EXT] 35 min</a:t>
+              <a:t>In this slide we cover Service lifecycle — Enable, Disable, Update (Ch.14). This material is covered in Ch.14 · service lifecycle · ServiceDisable listing.</a:t>
+            </a:r>
+          </a:p>
+          <a:p/>
+          <a:p>
+            <a:r>
+              <a:t>First, regarding serviceenable, creates WSTUN tunnel, assigns public_port, starts forwarding traffic. Next, regarding servicedisable, tears down tunnel, releases public_port back to pool 50001–50100.</a:t>
+            </a:r>
+          </a:p>
+          <a:p/>
+          <a:p>
+            <a:r>
+              <a:t>By contrast, Board must be Active before ServiceEnable — same prerequisite as plugin inject (Module A). We should also consider that Changing catalog port requires Disable, then update catalog, then re-Enable on affected boards.</a:t>
+            </a:r>
+          </a:p>
+          <a:p/>
+          <a:p>
+            <a:r>
+              <a:t>Another key point is that regarding multiple services per board, separate catalog entries (lr-nginx-demo :50000, wot :8080). Furthermore, Horizon boards column shows all active service mappings per board for operational audit.</a:t>
+            </a:r>
+          </a:p>
+          <a:p/>
+          <a:p>
+            <a:r>
+              <a:t>I'll pause here for questions, then we'll continue.</a:t>
             </a:r>
           </a:p>
         </p:txBody>
@@ -3284,7 +3999,31 @@
           <a:lstStyle/>
           <a:p>
             <a:r>
-              <a:t>[EXT] 6 min</a:t>
+              <a:t>In this slide we cover WSTUN vs Designate — decision guide (Ch.14). This material is covered in Ch.14 §14.3 · WSTUN vs Designate comparison table.</a:t>
+            </a:r>
+          </a:p>
+          <a:p/>
+          <a:p>
+            <a:r>
+              <a:t>First, regarding use wstun port mapping, lab, demos, quick tests — http://{{VM_IP}}:public_port/path. Next, regarding use designate dns, production, human URLs, WoT Find/Share layers, Module I Deviceless.</a:t>
+            </a:r>
+          </a:p>
+          <a:p/>
+          <a:p>
+            <a:r>
+              <a:t>By contrast, Same ServiceEnable API — difference is only how clients construct the public URL. We should also consider that Designate requires DNS zone + NGINX server_name config — more setup, better UX.</a:t>
+            </a:r>
+          </a:p>
+          <a:p/>
+          <a:p>
+            <a:r>
+              <a:t>Another key point is that Book weather demo intended for Designate path — WSTUN port path is lab training shortcut. Furthermore, Both paths traverse same WebSocket tunnel — WSTUNServer is shared infrastructure.</a:t>
+            </a:r>
+          </a:p>
+          <a:p/>
+          <a:p>
+            <a:r>
+              <a:t>I'll pause here for questions, then we'll continue.</a:t>
             </a:r>
           </a:p>
         </p:txBody>
@@ -3354,7 +4093,31 @@
           <a:lstStyle/>
           <a:p>
             <a:r>
-              <a:t>[EXT] 6 min</a:t>
+              <a:t>Now we move to the hands-on part: ServiceDisable cleanup (optional). Open your lab VM and follow along.</a:t>
+            </a:r>
+          </a:p>
+          <a:p/>
+          <a:p>
+            <a:r>
+              <a:t>First, regarding api, POST .../services/lr-nginx-demo/action with {"action":"ServiceDisable"}. Next, Verify Horizon boards column clears service mapping.</a:t>
+            </a:r>
+          </a:p>
+          <a:p/>
+          <a:p>
+            <a:r>
+              <a:t>By contrast, Re-Enable to confirm public_port may change — not guaranteed same port after recycle.</a:t>
+            </a:r>
+          </a:p>
+          <a:p/>
+          <a:p>
+            <a:r>
+              <a:t>Raise your hand if you're stuck — we'll wait until most of you are done.</a:t>
+            </a:r>
+          </a:p>
+          <a:p/>
+          <a:p>
+            <a:r>
+              <a:t>Instructor timing (title): Step 5 — ServiceDisable cleanup (optional)</a:t>
             </a:r>
           </a:p>
         </p:txBody>
@@ -3424,7 +4187,119 @@
           <a:lstStyle/>
           <a:p>
             <a:r>
-              <a:t>[EXT] 35 min</a:t>
+              <a:t>Now we move to the hands-on part: Validate WSTUN module. Open your lab VM and follow along.</a:t>
+            </a:r>
+          </a:p>
+          <a:p/>
+          <a:p>
+            <a:r>
+              <a:t>Please run the following command on your VM: cd training &amp;&amp; ./validate-lab-wstun.sh. Wait until you see a sensible result before continuing. Next, Script verifies catalog port, ServiceEnable state, and curl HTTP 200.</a:t>
+            </a:r>
+          </a:p>
+          <a:p/>
+          <a:p>
+            <a:r>
+              <a:t>Raise your hand if you're stuck — we'll wait until most of you are done.</a:t>
+            </a:r>
+          </a:p>
+          <a:p/>
+          <a:p>
+            <a:r>
+              <a:t>Instructor timing (title): Step 6 — Validate WSTUN module</a:t>
+            </a:r>
+          </a:p>
+        </p:txBody>
+      </p:sp>
+      <p:sp>
+        <p:nvSpPr>
+          <p:cNvPr id="4" name="Slide Number Placeholder 3"/>
+          <p:cNvSpPr>
+            <a:spLocks noGrp="1"/>
+          </p:cNvSpPr>
+          <p:nvPr>
+            <p:ph type="sldNum" idx="5" sz="quarter"/>
+          </p:nvPr>
+        </p:nvSpPr>
+        <p:spPr/>
+      </p:sp>
+    </p:spTree>
+  </p:cSld>
+  <p:clrMapOvr>
+    <a:masterClrMapping/>
+  </p:clrMapOvr>
+</p:notes>
+</file>
+
+<file path=ppt/notesSlides/notesSlide48.xml><?xml version="1.0" encoding="utf-8"?>
+<p:notes xmlns:a="http://schemas.openxmlformats.org/drawingml/2006/main" xmlns:p="http://schemas.openxmlformats.org/presentationml/2006/main" xmlns:r="http://schemas.openxmlformats.org/officeDocument/2006/relationships">
+  <p:cSld>
+    <p:spTree>
+      <p:nvGrpSpPr>
+        <p:cNvPr id="1" name=""/>
+        <p:cNvGrpSpPr/>
+        <p:nvPr/>
+      </p:nvGrpSpPr>
+      <p:grpSpPr>
+        <a:xfrm>
+          <a:off x="0" y="0"/>
+          <a:ext cx="0" cy="0"/>
+          <a:chOff x="0" y="0"/>
+          <a:chExt cx="0" cy="0"/>
+        </a:xfrm>
+      </p:grpSpPr>
+      <p:sp>
+        <p:nvSpPr>
+          <p:cNvPr id="2" name="Slide Image Placeholder 1"/>
+          <p:cNvSpPr>
+            <a:spLocks noGrp="1"/>
+          </p:cNvSpPr>
+          <p:nvPr>
+            <p:ph type="sldImg" idx="2"/>
+          </p:nvPr>
+        </p:nvSpPr>
+        <p:spPr/>
+      </p:sp>
+      <p:sp>
+        <p:nvSpPr>
+          <p:cNvPr id="3" name="Notes Placeholder 2"/>
+          <p:cNvSpPr>
+            <a:spLocks noGrp="1"/>
+          </p:cNvSpPr>
+          <p:nvPr>
+            <p:ph type="body" idx="3" sz="quarter"/>
+          </p:nvPr>
+        </p:nvSpPr>
+        <p:spPr/>
+        <p:txBody>
+          <a:bodyPr/>
+          <a:lstStyle/>
+          <a:p>
+            <a:r>
+              <a:t>On this slide, Module F checklist.</a:t>
+            </a:r>
+          </a:p>
+          <a:p/>
+          <a:p>
+            <a:r>
+              <a:t>First, regarding □ weather-wot service verified, curl /sensors, then JSON HTTP 200 (run-weather-demo.sh). Next, □ lr-nginx-demo port 50000, then public_port curl HTTP 200 (setup-wstun-demo.py).</a:t>
+            </a:r>
+          </a:p>
+          <a:p/>
+          <a:p>
+            <a:r>
+              <a:t>By contrast, □ Board Servizi column shows both tunnel mappings. We should also consider that □ Student can explain book port 8080 vs lab port 8088 (LR image constraint).</a:t>
+            </a:r>
+          </a:p>
+          <a:p/>
+          <a:p>
+            <a:r>
+              <a:t>Another key point is that □ Student can describe Designate path vs WSTUN port path. Furthermore, □ ./validate/validate-all.sh Module F checks pass.</a:t>
+            </a:r>
+          </a:p>
+          <a:p/>
+          <a:p>
+            <a:r>
+              <a:t>If these objectives are clear, we can proceed.</a:t>
             </a:r>
           </a:p>
         </p:txBody>
@@ -3494,7 +4369,31 @@
           <a:lstStyle/>
           <a:p>
             <a:r>
-              <a:t>[EXT] 35 min</a:t>
+              <a:t>In this slide we cover WoT layered model — Access layer (Ch.6). This material is covered in Ch.6 · fig:chap06:WoT-layers · Access.</a:t>
+            </a:r>
+          </a:p>
+          <a:p/>
+          <a:p>
+            <a:r>
+              <a:t>First, regarding device becomes http resource, GET /temperature, POST /led, GET /humidity. Next, regarding content negotiation, JSON for machines, HTML for human-readable sensor dashboards.</a:t>
+            </a:r>
+          </a:p>
+          <a:p/>
+          <a:p>
+            <a:r>
+              <a:t>By contrast, regarding gateway pattern, heterogeneous sensors, then LR adapts protocols, then uniform REST on HTTP/S. We should also consider that regarding book live demo, wot.rasp-univ.iot.* — Flask endpoints on Raspberry Pi gateway.</a:t>
+            </a:r>
+          </a:p>
+          <a:p/>
+          <a:p>
+            <a:r>
+              <a:t>Another key point is that regarding security, HTTPS termination at cloud reverse proxy; board may use HTTP internally. Furthermore, regarding book figure, fig:chap06:WoT-layers — Access is the foundation layer.</a:t>
+            </a:r>
+          </a:p>
+          <a:p/>
+          <a:p>
+            <a:r>
+              <a:t>I'll pause here for questions, then we'll continue.</a:t>
             </a:r>
           </a:p>
         </p:txBody>
@@ -3564,7 +4463,31 @@
           <a:lstStyle/>
           <a:p>
             <a:r>
-              <a:t>[EXT] 35 min</a:t>
+              <a:t>In this slide we cover WoT layered model — Find, Share, Compose (Ch.6). This material is covered in Ch.6 · Find · Share · Compose layers.</a:t>
+            </a:r>
+          </a:p>
+          <a:p/>
+          <a:p>
+            <a:r>
+              <a:t>First, regarding find, machine-readable Thing Descriptions + discovery mechanisms (CoRE Link Format, etc.). Next, regarding share, cross-domain access with social/trust models — who may read/actuate which Thing.</a:t>
+            </a:r>
+          </a:p>
+          <a:p/>
+          <a:p>
+            <a:r>
+              <a:t>By contrast, regarding compose, mashups combining distributed Web Things (sensor page + live video + map). We should also consider that regarding s4t stack, designate DNS + IoTronic service catalog enable Find at Web scale.</a:t>
+            </a:r>
+          </a:p>
+          <a:p/>
+          <a:p>
+            <a:r>
+              <a:t>Another key point is that Horizon Web Services Manager exposes human-friendly URLs for board services. Furthermore, DeXMS mediators (Ch.6 §6.4) deploy protocol bridges (MQTT, CoAP) on remote gateways.</a:t>
+            </a:r>
+          </a:p>
+          <a:p/>
+          <a:p>
+            <a:r>
+              <a:t>I'll pause here for questions, then we'll continue.</a:t>
             </a:r>
           </a:p>
         </p:txBody>
@@ -3634,7 +4557,31 @@
           <a:lstStyle/>
           <a:p>
             <a:r>
-              <a:t>[EXT] 35 min</a:t>
+              <a:t>In this slide we cover Gateway-based WoT in S4T (Ch.6 §6.4). This material is covered in Ch.6 §6.4 · Stack4Things gateway WoT system · fig:chap06:s4t-wot.</a:t>
+            </a:r>
+          </a:p>
+          <a:p/>
+          <a:p>
+            <a:r>
+              <a:t>First, Heterogeneous boards connect via Lightning-Rod — protocol adaptation at the edge. Next, regarding cloud stack, designate (DNS) + IoTronic + NGINX reverse proxy + WebSocket tunnels.</a:t>
+            </a:r>
+          </a:p>
+          <a:p/>
+          <a:p>
+            <a:r>
+              <a:t>By contrast, regarding book architecture, cloud NGINX routes https://wot.board.example.com, then board HTTP service. We should also consider that LR runs local HTTP server (Flask, nginx) — cloud exposes it on public URL or port.</a:t>
+            </a:r>
+          </a:p>
+          <a:p/>
+          <a:p>
+            <a:r>
+              <a:t>Another key point is that WoT Thing Description documents available endpoints for automated discovery. Furthermore, Training lab uses WSTUN port mapping instead of full Designate DNS registration.</a:t>
+            </a:r>
+          </a:p>
+          <a:p/>
+          <a:p>
+            <a:r>
+              <a:t>I'll pause here for questions, then we'll continue.</a:t>
             </a:r>
           </a:p>
         </p:txBody>
@@ -3704,7 +4651,31 @@
           <a:lstStyle/>
           <a:p>
             <a:r>
-              <a:t>[EXT] 35 min</a:t>
+              <a:t>In this slide we cover Designate DNS and ACME certificates (Ch.6). This material is covered in Ch.6 § DNS in OpenStack · Designate · ACME · sec:expose-service.</a:t>
+            </a:r>
+          </a:p>
+          <a:p/>
+          <a:p>
+            <a:r>
+              <a:t>First, Designate is OpenStack's DNS-as-a-service — manages zones and records for board subdomains. Next, regarding production wot url, web-server.node-A.example.com decomposed into service.node.fqdn parts.</a:t>
+            </a:r>
+          </a:p>
+          <a:p/>
+          <a:p>
+            <a:r>
+              <a:t>By contrast, ACME (Certbot/Let's Encrypt) issues DV TLS certificates once DNS records propagate. We should also consider that Cloud NGINX terminates HTTPS and forwards to WSTUN backend for the matching board tunnel.</a:t>
+            </a:r>
+          </a:p>
+          <a:p/>
+          <a:p>
+            <a:r>
+              <a:t>Another key point is that regarding nine-step book workflow, catalog service, then Enable, then DNS, then cert, then NGINX, then public HTTPS URL. Furthermore, Lab WSTUN skips DNS/ACME — same ServiceEnable API, different public endpoint format.</a:t>
+            </a:r>
+          </a:p>
+          <a:p/>
+          <a:p>
+            <a:r>
+              <a:t>I'll pause here for questions, then we'll continue.</a:t>
             </a:r>
           </a:p>
         </p:txBody>
@@ -3774,7 +4745,31 @@
           <a:lstStyle/>
           <a:p>
             <a:r>
-              <a:t>[EXT] 35 min</a:t>
+              <a:t>In this slide we cover DeXMS — gateway mediators for heterogeneous protocols (Ch.6). This material is covered in Ch.6 §6.4 DeXMS · CoAP/MQTT mediation · fig:chap06:mediation.</a:t>
+            </a:r>
+          </a:p>
+          <a:p/>
+          <a:p>
+            <a:r>
+              <a:t>First, DeXMS deploys protocol-bridge mediators on remote gateways via IoTronic RPC. Next, DeXIDL GUI generates mediator JARs — packaged into LR Docker images for K8s/K3s rollout.</a:t>
+            </a:r>
+          </a:p>
+          <a:p/>
+          <a:p>
+            <a:r>
+              <a:t>By contrast, CoAP observe streams and MQTT pub/sub topics become HTTP endpoints for WoT consumers. We should also consider that ESB-style integration without forcing every sensor to speak HTTP natively.</a:t>
+            </a:r>
+          </a:p>
+          <a:p/>
+          <a:p>
+            <a:r>
+              <a:t>Another key point is that regarding book sequence diagrams, coAP, then HTTP and MQTT, then HTTP mediation paths (fig:chap06:coap/mqtt). Furthermore, Connects Module F HTTP demos to constrained-device protocols in smart-city deployments.</a:t>
+            </a:r>
+          </a:p>
+          <a:p/>
+          <a:p>
+            <a:r>
+              <a:t>I'll pause here for questions, then we'll continue.</a:t>
             </a:r>
           </a:p>
         </p:txBody>
@@ -6950,7 +7945,7 @@
           <a:lstStyle/>
           <a:p>
             <a:pPr>
-              <a:defRPr sz="3800" b="1">
+              <a:defRPr sz="4000" b="1">
                 <a:solidFill>
                   <a:srgbClr val="FFFFFF"/>
                 </a:solidFill>
@@ -6989,7 +7984,7 @@
               <a:spcAft>
                 <a:spcPts val="400"/>
               </a:spcAft>
-              <a:defRPr sz="2000" b="0">
+              <a:defRPr sz="2200" b="0">
                 <a:solidFill>
                   <a:srgbClr val="B2EBF2"/>
                 </a:solidFill>
@@ -7226,7 +8221,7 @@
           <a:lstStyle/>
           <a:p>
             <a:pPr algn="r">
-              <a:defRPr sz="1000" b="0">
+              <a:defRPr sz="1100" b="0">
                 <a:solidFill>
                   <a:srgbClr val="78909C"/>
                 </a:solidFill>
@@ -7262,7 +8257,7 @@
           <a:lstStyle/>
           <a:p>
             <a:pPr>
-              <a:defRPr sz="2400" b="1">
+              <a:defRPr sz="2600" b="1">
                 <a:solidFill>
                   <a:srgbClr val="0D2B45"/>
                 </a:solidFill>
@@ -7284,7 +8279,7 @@
         <p:spPr>
           <a:xfrm>
             <a:off x="502920" y="1554480"/>
-            <a:ext cx="11155680" cy="2651759"/>
+            <a:ext cx="11155680" cy="4800600"/>
           </a:xfrm>
           <a:prstGeom prst="roundRect">
             <a:avLst/>
@@ -7329,7 +8324,7 @@
         <p:spPr>
           <a:xfrm>
             <a:off x="777240" y="1673352"/>
-            <a:ext cx="10424160" cy="2468879"/>
+            <a:ext cx="10424160" cy="4572000"/>
           </a:xfrm>
           <a:prstGeom prst="rect">
             <a:avLst/>
@@ -7349,7 +8344,7 @@
               <a:spcAft>
                 <a:spcPts val="500"/>
               </a:spcAft>
-              <a:defRPr sz="1500" b="0">
+              <a:defRPr sz="1600" b="0">
                 <a:solidFill>
                   <a:srgbClr val="37474F"/>
                 </a:solidFill>
@@ -7368,7 +8363,7 @@
               <a:spcAft>
                 <a:spcPts val="500"/>
               </a:spcAft>
-              <a:defRPr sz="1500" b="0">
+              <a:defRPr sz="1600" b="0">
                 <a:solidFill>
                   <a:srgbClr val="37474F"/>
                 </a:solidFill>
@@ -7387,7 +8382,7 @@
               <a:spcAft>
                 <a:spcPts val="500"/>
               </a:spcAft>
-              <a:defRPr sz="1500" b="0">
+              <a:defRPr sz="1600" b="0">
                 <a:solidFill>
                   <a:srgbClr val="37474F"/>
                 </a:solidFill>
@@ -7406,7 +8401,7 @@
               <a:spcAft>
                 <a:spcPts val="500"/>
               </a:spcAft>
-              <a:defRPr sz="1500" b="0">
+              <a:defRPr sz="1600" b="0">
                 <a:solidFill>
                   <a:srgbClr val="37474F"/>
                 </a:solidFill>
@@ -7425,7 +8420,7 @@
               <a:spcAft>
                 <a:spcPts val="500"/>
               </a:spcAft>
-              <a:defRPr sz="1500" b="0">
+              <a:defRPr sz="1600" b="0">
                 <a:solidFill>
                   <a:srgbClr val="37474F"/>
                 </a:solidFill>
@@ -7444,7 +8439,7 @@
               <a:spcAft>
                 <a:spcPts val="500"/>
               </a:spcAft>
-              <a:defRPr sz="1500" b="0">
+              <a:defRPr sz="1600" b="0">
                 <a:solidFill>
                   <a:srgbClr val="37474F"/>
                 </a:solidFill>
@@ -7664,7 +8659,7 @@
           <a:lstStyle/>
           <a:p>
             <a:pPr algn="ctr">
-              <a:defRPr sz="3600" b="1">
+              <a:defRPr sz="3800" b="1">
                 <a:solidFill>
                   <a:srgbClr val="FFFFFF"/>
                 </a:solidFill>
@@ -7700,7 +8695,7 @@
           <a:lstStyle/>
           <a:p>
             <a:pPr algn="ctr">
-              <a:defRPr sz="2000" b="0">
+              <a:defRPr sz="2200" b="0">
                 <a:solidFill>
                   <a:srgbClr val="B2EBF2"/>
                 </a:solidFill>
@@ -7858,7 +8853,7 @@
           <a:lstStyle/>
           <a:p>
             <a:pPr algn="r">
-              <a:defRPr sz="1000" b="0">
+              <a:defRPr sz="1100" b="0">
                 <a:solidFill>
                   <a:srgbClr val="78909C"/>
                 </a:solidFill>
@@ -7894,7 +8889,7 @@
           <a:lstStyle/>
           <a:p>
             <a:pPr>
-              <a:defRPr sz="2400" b="1">
+              <a:defRPr sz="2600" b="1">
                 <a:solidFill>
                   <a:srgbClr val="0D2B45"/>
                 </a:solidFill>
@@ -7916,7 +8911,7 @@
         <p:spPr>
           <a:xfrm>
             <a:off x="502920" y="1554480"/>
-            <a:ext cx="11155680" cy="2651759"/>
+            <a:ext cx="11155680" cy="4800600"/>
           </a:xfrm>
           <a:prstGeom prst="roundRect">
             <a:avLst/>
@@ -7961,7 +8956,7 @@
         <p:spPr>
           <a:xfrm>
             <a:off x="777240" y="1673352"/>
-            <a:ext cx="10424160" cy="2468879"/>
+            <a:ext cx="10424160" cy="4572000"/>
           </a:xfrm>
           <a:prstGeom prst="rect">
             <a:avLst/>
@@ -7981,7 +8976,7 @@
               <a:spcAft>
                 <a:spcPts val="500"/>
               </a:spcAft>
-              <a:defRPr sz="1500" b="0">
+              <a:defRPr sz="1600" b="0">
                 <a:solidFill>
                   <a:srgbClr val="37474F"/>
                 </a:solidFill>
@@ -8000,7 +8995,7 @@
               <a:spcAft>
                 <a:spcPts val="500"/>
               </a:spcAft>
-              <a:defRPr sz="1500" b="0">
+              <a:defRPr sz="1600" b="0">
                 <a:solidFill>
                   <a:srgbClr val="37474F"/>
                 </a:solidFill>
@@ -8019,7 +9014,7 @@
               <a:spcAft>
                 <a:spcPts val="500"/>
               </a:spcAft>
-              <a:defRPr sz="1500" b="0">
+              <a:defRPr sz="1600" b="0">
                 <a:solidFill>
                   <a:srgbClr val="37474F"/>
                 </a:solidFill>
@@ -8038,7 +9033,7 @@
               <a:spcAft>
                 <a:spcPts val="500"/>
               </a:spcAft>
-              <a:defRPr sz="1500" b="0">
+              <a:defRPr sz="1600" b="0">
                 <a:solidFill>
                   <a:srgbClr val="37474F"/>
                 </a:solidFill>
@@ -8057,7 +9052,7 @@
               <a:spcAft>
                 <a:spcPts val="500"/>
               </a:spcAft>
-              <a:defRPr sz="1500" b="0">
+              <a:defRPr sz="1600" b="0">
                 <a:solidFill>
                   <a:srgbClr val="37474F"/>
                 </a:solidFill>
@@ -8076,7 +9071,7 @@
               <a:spcAft>
                 <a:spcPts val="500"/>
               </a:spcAft>
-              <a:defRPr sz="1500" b="0">
+              <a:defRPr sz="1600" b="0">
                 <a:solidFill>
                   <a:srgbClr val="37474F"/>
                 </a:solidFill>
@@ -8349,7 +9344,7 @@
           <a:lstStyle/>
           <a:p>
             <a:pPr algn="r">
-              <a:defRPr sz="1000" b="0">
+              <a:defRPr sz="1100" b="0">
                 <a:solidFill>
                   <a:srgbClr val="78909C"/>
                 </a:solidFill>
@@ -8385,7 +9380,7 @@
           <a:lstStyle/>
           <a:p>
             <a:pPr>
-              <a:defRPr sz="2400" b="1">
+              <a:defRPr sz="2600" b="1">
                 <a:solidFill>
                   <a:srgbClr val="0D2B45"/>
                 </a:solidFill>
@@ -8407,7 +9402,7 @@
         <p:spPr>
           <a:xfrm>
             <a:off x="502920" y="1554480"/>
-            <a:ext cx="11155680" cy="2651759"/>
+            <a:ext cx="11155680" cy="4800600"/>
           </a:xfrm>
           <a:prstGeom prst="roundRect">
             <a:avLst/>
@@ -8452,7 +9447,7 @@
         <p:spPr>
           <a:xfrm>
             <a:off x="777240" y="1673352"/>
-            <a:ext cx="10424160" cy="2468879"/>
+            <a:ext cx="10424160" cy="4572000"/>
           </a:xfrm>
           <a:prstGeom prst="rect">
             <a:avLst/>
@@ -8472,7 +9467,7 @@
               <a:spcAft>
                 <a:spcPts val="500"/>
               </a:spcAft>
-              <a:defRPr sz="1500" b="0">
+              <a:defRPr sz="1600" b="0">
                 <a:solidFill>
                   <a:srgbClr val="37474F"/>
                 </a:solidFill>
@@ -8491,7 +9486,7 @@
               <a:spcAft>
                 <a:spcPts val="500"/>
               </a:spcAft>
-              <a:defRPr sz="1500" b="0">
+              <a:defRPr sz="1600" b="0">
                 <a:solidFill>
                   <a:srgbClr val="37474F"/>
                 </a:solidFill>
@@ -8510,7 +9505,7 @@
               <a:spcAft>
                 <a:spcPts val="500"/>
               </a:spcAft>
-              <a:defRPr sz="1500" b="0">
+              <a:defRPr sz="1600" b="0">
                 <a:solidFill>
                   <a:srgbClr val="37474F"/>
                 </a:solidFill>
@@ -8529,7 +9524,7 @@
               <a:spcAft>
                 <a:spcPts val="500"/>
               </a:spcAft>
-              <a:defRPr sz="1500" b="0">
+              <a:defRPr sz="1600" b="0">
                 <a:solidFill>
                   <a:srgbClr val="37474F"/>
                 </a:solidFill>
@@ -8548,7 +9543,7 @@
               <a:spcAft>
                 <a:spcPts val="500"/>
               </a:spcAft>
-              <a:defRPr sz="1500" b="0">
+              <a:defRPr sz="1600" b="0">
                 <a:solidFill>
                   <a:srgbClr val="37474F"/>
                 </a:solidFill>
@@ -8567,7 +9562,7 @@
               <a:spcAft>
                 <a:spcPts val="500"/>
               </a:spcAft>
-              <a:defRPr sz="1500" b="0">
+              <a:defRPr sz="1600" b="0">
                 <a:solidFill>
                   <a:srgbClr val="37474F"/>
                 </a:solidFill>
@@ -8840,7 +9835,7 @@
           <a:lstStyle/>
           <a:p>
             <a:pPr algn="r">
-              <a:defRPr sz="1000" b="0">
+              <a:defRPr sz="1100" b="0">
                 <a:solidFill>
                   <a:srgbClr val="78909C"/>
                 </a:solidFill>
@@ -8876,7 +9871,7 @@
           <a:lstStyle/>
           <a:p>
             <a:pPr>
-              <a:defRPr sz="2400" b="1">
+              <a:defRPr sz="2600" b="1">
                 <a:solidFill>
                   <a:srgbClr val="0D2B45"/>
                 </a:solidFill>
@@ -8898,7 +9893,7 @@
         <p:spPr>
           <a:xfrm>
             <a:off x="502920" y="1554480"/>
-            <a:ext cx="11155680" cy="2651759"/>
+            <a:ext cx="11155680" cy="4800600"/>
           </a:xfrm>
           <a:prstGeom prst="roundRect">
             <a:avLst/>
@@ -8943,7 +9938,7 @@
         <p:spPr>
           <a:xfrm>
             <a:off x="777240" y="1673352"/>
-            <a:ext cx="10424160" cy="2468879"/>
+            <a:ext cx="10424160" cy="4572000"/>
           </a:xfrm>
           <a:prstGeom prst="rect">
             <a:avLst/>
@@ -8963,7 +9958,7 @@
               <a:spcAft>
                 <a:spcPts val="500"/>
               </a:spcAft>
-              <a:defRPr sz="1500" b="0">
+              <a:defRPr sz="1600" b="0">
                 <a:solidFill>
                   <a:srgbClr val="37474F"/>
                 </a:solidFill>
@@ -8982,7 +9977,7 @@
               <a:spcAft>
                 <a:spcPts val="500"/>
               </a:spcAft>
-              <a:defRPr sz="1500" b="0">
+              <a:defRPr sz="1600" b="0">
                 <a:solidFill>
                   <a:srgbClr val="37474F"/>
                 </a:solidFill>
@@ -9001,7 +9996,7 @@
               <a:spcAft>
                 <a:spcPts val="500"/>
               </a:spcAft>
-              <a:defRPr sz="1500" b="0">
+              <a:defRPr sz="1600" b="0">
                 <a:solidFill>
                   <a:srgbClr val="37474F"/>
                 </a:solidFill>
@@ -9020,7 +10015,7 @@
               <a:spcAft>
                 <a:spcPts val="500"/>
               </a:spcAft>
-              <a:defRPr sz="1500" b="0">
+              <a:defRPr sz="1600" b="0">
                 <a:solidFill>
                   <a:srgbClr val="37474F"/>
                 </a:solidFill>
@@ -9039,7 +10034,7 @@
               <a:spcAft>
                 <a:spcPts val="500"/>
               </a:spcAft>
-              <a:defRPr sz="1500" b="0">
+              <a:defRPr sz="1600" b="0">
                 <a:solidFill>
                   <a:srgbClr val="37474F"/>
                 </a:solidFill>
@@ -9058,7 +10053,7 @@
               <a:spcAft>
                 <a:spcPts val="500"/>
               </a:spcAft>
-              <a:defRPr sz="1500" b="0">
+              <a:defRPr sz="1600" b="0">
                 <a:solidFill>
                   <a:srgbClr val="37474F"/>
                 </a:solidFill>
@@ -9331,7 +10326,7 @@
           <a:lstStyle/>
           <a:p>
             <a:pPr algn="r">
-              <a:defRPr sz="1000" b="0">
+              <a:defRPr sz="1100" b="0">
                 <a:solidFill>
                   <a:srgbClr val="78909C"/>
                 </a:solidFill>
@@ -9367,7 +10362,7 @@
           <a:lstStyle/>
           <a:p>
             <a:pPr>
-              <a:defRPr sz="2400" b="1">
+              <a:defRPr sz="2600" b="1">
                 <a:solidFill>
                   <a:srgbClr val="0D2B45"/>
                 </a:solidFill>
@@ -9389,7 +10384,7 @@
         <p:spPr>
           <a:xfrm>
             <a:off x="502920" y="1554480"/>
-            <a:ext cx="11155680" cy="2651759"/>
+            <a:ext cx="11155680" cy="4800600"/>
           </a:xfrm>
           <a:prstGeom prst="roundRect">
             <a:avLst/>
@@ -9434,7 +10429,7 @@
         <p:spPr>
           <a:xfrm>
             <a:off x="777240" y="1673352"/>
-            <a:ext cx="10424160" cy="2468879"/>
+            <a:ext cx="10424160" cy="4572000"/>
           </a:xfrm>
           <a:prstGeom prst="rect">
             <a:avLst/>
@@ -9454,7 +10449,7 @@
               <a:spcAft>
                 <a:spcPts val="500"/>
               </a:spcAft>
-              <a:defRPr sz="1500" b="0">
+              <a:defRPr sz="1600" b="0">
                 <a:solidFill>
                   <a:srgbClr val="37474F"/>
                 </a:solidFill>
@@ -9473,7 +10468,7 @@
               <a:spcAft>
                 <a:spcPts val="500"/>
               </a:spcAft>
-              <a:defRPr sz="1500" b="0">
+              <a:defRPr sz="1600" b="0">
                 <a:solidFill>
                   <a:srgbClr val="37474F"/>
                 </a:solidFill>
@@ -9492,7 +10487,7 @@
               <a:spcAft>
                 <a:spcPts val="500"/>
               </a:spcAft>
-              <a:defRPr sz="1500" b="0">
+              <a:defRPr sz="1600" b="0">
                 <a:solidFill>
                   <a:srgbClr val="37474F"/>
                 </a:solidFill>
@@ -9511,7 +10506,7 @@
               <a:spcAft>
                 <a:spcPts val="500"/>
               </a:spcAft>
-              <a:defRPr sz="1500" b="0">
+              <a:defRPr sz="1600" b="0">
                 <a:solidFill>
                   <a:srgbClr val="37474F"/>
                 </a:solidFill>
@@ -9530,7 +10525,7 @@
               <a:spcAft>
                 <a:spcPts val="500"/>
               </a:spcAft>
-              <a:defRPr sz="1500" b="0">
+              <a:defRPr sz="1600" b="0">
                 <a:solidFill>
                   <a:srgbClr val="37474F"/>
                 </a:solidFill>
@@ -9549,7 +10544,7 @@
               <a:spcAft>
                 <a:spcPts val="500"/>
               </a:spcAft>
-              <a:defRPr sz="1500" b="0">
+              <a:defRPr sz="1600" b="0">
                 <a:solidFill>
                   <a:srgbClr val="37474F"/>
                 </a:solidFill>
@@ -9822,7 +10817,7 @@
           <a:lstStyle/>
           <a:p>
             <a:pPr algn="r">
-              <a:defRPr sz="1000" b="0">
+              <a:defRPr sz="1100" b="0">
                 <a:solidFill>
                   <a:srgbClr val="78909C"/>
                 </a:solidFill>
@@ -9858,7 +10853,7 @@
           <a:lstStyle/>
           <a:p>
             <a:pPr>
-              <a:defRPr sz="2400" b="1">
+              <a:defRPr sz="2600" b="1">
                 <a:solidFill>
                   <a:srgbClr val="0D2B45"/>
                 </a:solidFill>
@@ -9880,7 +10875,7 @@
         <p:spPr>
           <a:xfrm>
             <a:off x="502920" y="1554480"/>
-            <a:ext cx="11155680" cy="2651759"/>
+            <a:ext cx="11155680" cy="4800600"/>
           </a:xfrm>
           <a:prstGeom prst="roundRect">
             <a:avLst/>
@@ -9925,7 +10920,7 @@
         <p:spPr>
           <a:xfrm>
             <a:off x="777240" y="1673352"/>
-            <a:ext cx="10424160" cy="2468879"/>
+            <a:ext cx="10424160" cy="4572000"/>
           </a:xfrm>
           <a:prstGeom prst="rect">
             <a:avLst/>
@@ -9945,7 +10940,7 @@
               <a:spcAft>
                 <a:spcPts val="500"/>
               </a:spcAft>
-              <a:defRPr sz="1500" b="0">
+              <a:defRPr sz="1600" b="0">
                 <a:solidFill>
                   <a:srgbClr val="37474F"/>
                 </a:solidFill>
@@ -9964,7 +10959,7 @@
               <a:spcAft>
                 <a:spcPts val="500"/>
               </a:spcAft>
-              <a:defRPr sz="1500" b="0">
+              <a:defRPr sz="1600" b="0">
                 <a:solidFill>
                   <a:srgbClr val="37474F"/>
                 </a:solidFill>
@@ -9983,7 +10978,7 @@
               <a:spcAft>
                 <a:spcPts val="500"/>
               </a:spcAft>
-              <a:defRPr sz="1500" b="0">
+              <a:defRPr sz="1600" b="0">
                 <a:solidFill>
                   <a:srgbClr val="37474F"/>
                 </a:solidFill>
@@ -10002,7 +10997,7 @@
               <a:spcAft>
                 <a:spcPts val="500"/>
               </a:spcAft>
-              <a:defRPr sz="1500" b="0">
+              <a:defRPr sz="1600" b="0">
                 <a:solidFill>
                   <a:srgbClr val="37474F"/>
                 </a:solidFill>
@@ -10021,7 +11016,7 @@
               <a:spcAft>
                 <a:spcPts val="500"/>
               </a:spcAft>
-              <a:defRPr sz="1500" b="0">
+              <a:defRPr sz="1600" b="0">
                 <a:solidFill>
                   <a:srgbClr val="37474F"/>
                 </a:solidFill>
@@ -10040,7 +11035,7 @@
               <a:spcAft>
                 <a:spcPts val="500"/>
               </a:spcAft>
-              <a:defRPr sz="1500" b="0">
+              <a:defRPr sz="1600" b="0">
                 <a:solidFill>
                   <a:srgbClr val="37474F"/>
                 </a:solidFill>
@@ -10245,7 +11240,7 @@
         </p:nvSpPr>
         <p:spPr>
           <a:xfrm>
-            <a:off x="594360" y="438912"/>
+            <a:off x="594360" y="347472"/>
             <a:ext cx="10972800" cy="868680"/>
           </a:xfrm>
           <a:prstGeom prst="rect">
@@ -10281,8 +11276,8 @@
         </p:nvSpPr>
         <p:spPr>
           <a:xfrm>
-            <a:off x="2542260" y="1426464"/>
-            <a:ext cx="7107173" cy="4123944"/>
+            <a:off x="1120368" y="1298448"/>
+            <a:ext cx="9950958" cy="5733288"/>
           </a:xfrm>
           <a:prstGeom prst="roundRect">
             <a:avLst/>
@@ -10334,8 +11329,8 @@
         </p:blipFill>
         <p:spPr>
           <a:xfrm>
-            <a:off x="2615412" y="1499616"/>
-            <a:ext cx="6960869" cy="3977639"/>
+            <a:off x="1175232" y="1353312"/>
+            <a:ext cx="9841230" cy="5623560"/>
           </a:xfrm>
           <a:prstGeom prst="rect">
             <a:avLst/>
@@ -10350,7 +11345,7 @@
         </p:nvSpPr>
         <p:spPr>
           <a:xfrm>
-            <a:off x="594360" y="5687568"/>
+            <a:off x="594360" y="7168896"/>
             <a:ext cx="10972800" cy="411480"/>
           </a:xfrm>
           <a:prstGeom prst="rect">
@@ -10365,7 +11360,7 @@
           <a:lstStyle/>
           <a:p>
             <a:pPr>
-              <a:defRPr sz="1100" b="0">
+              <a:defRPr sz="1200" b="0">
                 <a:solidFill>
                   <a:srgbClr val="37474F"/>
                 </a:solidFill>
@@ -10570,7 +11565,7 @@
         </p:nvSpPr>
         <p:spPr>
           <a:xfrm>
-            <a:off x="594360" y="438912"/>
+            <a:off x="594360" y="347472"/>
             <a:ext cx="10972800" cy="868680"/>
           </a:xfrm>
           <a:prstGeom prst="rect">
@@ -10606,8 +11601,8 @@
         </p:nvSpPr>
         <p:spPr>
           <a:xfrm>
-            <a:off x="2785081" y="1426464"/>
-            <a:ext cx="6621531" cy="4123944"/>
+            <a:off x="1463667" y="1298448"/>
+            <a:ext cx="9264360" cy="5733288"/>
           </a:xfrm>
           <a:prstGeom prst="roundRect">
             <a:avLst/>
@@ -10659,8 +11654,8 @@
         </p:blipFill>
         <p:spPr>
           <a:xfrm>
-            <a:off x="2858233" y="1499616"/>
-            <a:ext cx="6475227" cy="3977639"/>
+            <a:off x="1518531" y="1353312"/>
+            <a:ext cx="9154632" cy="5623560"/>
           </a:xfrm>
           <a:prstGeom prst="rect">
             <a:avLst/>
@@ -10675,7 +11670,7 @@
         </p:nvSpPr>
         <p:spPr>
           <a:xfrm>
-            <a:off x="594360" y="5687568"/>
+            <a:off x="594360" y="7168896"/>
             <a:ext cx="10972800" cy="411480"/>
           </a:xfrm>
           <a:prstGeom prst="rect">
@@ -10690,7 +11685,7 @@
           <a:lstStyle/>
           <a:p>
             <a:pPr>
-              <a:defRPr sz="1100" b="0">
+              <a:defRPr sz="1200" b="0">
                 <a:solidFill>
                   <a:srgbClr val="37474F"/>
                 </a:solidFill>
@@ -10910,7 +11905,7 @@
           <a:lstStyle/>
           <a:p>
             <a:pPr>
-              <a:defRPr sz="2800" b="1">
+              <a:defRPr sz="3000" b="1">
                 <a:solidFill>
                   <a:srgbClr val="0D2B45"/>
                 </a:solidFill>
@@ -10932,7 +11927,7 @@
         <p:spPr>
           <a:xfrm>
             <a:off x="502920" y="1344168"/>
-            <a:ext cx="11155680" cy="2331720"/>
+            <a:ext cx="11155680" cy="5010912"/>
           </a:xfrm>
           <a:prstGeom prst="roundRect">
             <a:avLst/>
@@ -10977,7 +11972,7 @@
         <p:spPr>
           <a:xfrm>
             <a:off x="777240" y="1463040"/>
-            <a:ext cx="10424160" cy="2148840"/>
+            <a:ext cx="10424160" cy="4782312"/>
           </a:xfrm>
           <a:prstGeom prst="rect">
             <a:avLst/>
@@ -10997,7 +11992,7 @@
               <a:spcAft>
                 <a:spcPts val="800"/>
               </a:spcAft>
-              <a:defRPr sz="1700" b="0">
+              <a:defRPr sz="1900" b="0">
                 <a:solidFill>
                   <a:srgbClr val="37474F"/>
                 </a:solidFill>
@@ -11016,7 +12011,7 @@
               <a:spcAft>
                 <a:spcPts val="800"/>
               </a:spcAft>
-              <a:defRPr sz="1700" b="0">
+              <a:defRPr sz="1900" b="0">
                 <a:solidFill>
                   <a:srgbClr val="37474F"/>
                 </a:solidFill>
@@ -11035,7 +12030,7 @@
               <a:spcAft>
                 <a:spcPts val="800"/>
               </a:spcAft>
-              <a:defRPr sz="1700" b="0">
+              <a:defRPr sz="1900" b="0">
                 <a:solidFill>
                   <a:srgbClr val="37474F"/>
                 </a:solidFill>
@@ -11054,7 +12049,7 @@
               <a:spcAft>
                 <a:spcPts val="800"/>
               </a:spcAft>
-              <a:defRPr sz="1700" b="0">
+              <a:defRPr sz="1900" b="0">
                 <a:solidFill>
                   <a:srgbClr val="37474F"/>
                 </a:solidFill>
@@ -11073,7 +12068,7 @@
               <a:spcAft>
                 <a:spcPts val="800"/>
               </a:spcAft>
-              <a:defRPr sz="1700" b="0">
+              <a:defRPr sz="1900" b="0">
                 <a:solidFill>
                   <a:srgbClr val="37474F"/>
                 </a:solidFill>
@@ -11257,7 +12252,7 @@
           <a:lstStyle/>
           <a:p>
             <a:pPr algn="ctr">
-              <a:defRPr sz="3600" b="1">
+              <a:defRPr sz="3800" b="1">
                 <a:solidFill>
                   <a:srgbClr val="FFFFFF"/>
                 </a:solidFill>
@@ -11293,7 +12288,7 @@
           <a:lstStyle/>
           <a:p>
             <a:pPr algn="ctr">
-              <a:defRPr sz="2000" b="0">
+              <a:defRPr sz="2200" b="0">
                 <a:solidFill>
                   <a:srgbClr val="B2EBF2"/>
                 </a:solidFill>
@@ -11451,7 +12446,7 @@
           <a:lstStyle/>
           <a:p>
             <a:pPr>
-              <a:defRPr sz="2400" b="1">
+              <a:defRPr sz="2600" b="1">
                 <a:solidFill>
                   <a:srgbClr val="0D2B45"/>
                 </a:solidFill>
@@ -11473,7 +12468,7 @@
         <p:spPr>
           <a:xfrm>
             <a:off x="502920" y="1554480"/>
-            <a:ext cx="11155680" cy="2651759"/>
+            <a:ext cx="11155680" cy="4800600"/>
           </a:xfrm>
           <a:prstGeom prst="roundRect">
             <a:avLst/>
@@ -11518,7 +12513,7 @@
         <p:spPr>
           <a:xfrm>
             <a:off x="777240" y="1673352"/>
-            <a:ext cx="10424160" cy="2468879"/>
+            <a:ext cx="10424160" cy="4572000"/>
           </a:xfrm>
           <a:prstGeom prst="rect">
             <a:avLst/>
@@ -11538,7 +12533,7 @@
               <a:spcAft>
                 <a:spcPts val="500"/>
               </a:spcAft>
-              <a:defRPr sz="1500" b="0">
+              <a:defRPr sz="1600" b="0">
                 <a:solidFill>
                   <a:srgbClr val="37474F"/>
                 </a:solidFill>
@@ -11557,7 +12552,7 @@
               <a:spcAft>
                 <a:spcPts val="500"/>
               </a:spcAft>
-              <a:defRPr sz="1500" b="0">
+              <a:defRPr sz="1600" b="0">
                 <a:solidFill>
                   <a:srgbClr val="37474F"/>
                 </a:solidFill>
@@ -11576,7 +12571,7 @@
               <a:spcAft>
                 <a:spcPts val="500"/>
               </a:spcAft>
-              <a:defRPr sz="1500" b="0">
+              <a:defRPr sz="1600" b="0">
                 <a:solidFill>
                   <a:srgbClr val="37474F"/>
                 </a:solidFill>
@@ -11595,7 +12590,7 @@
               <a:spcAft>
                 <a:spcPts val="500"/>
               </a:spcAft>
-              <a:defRPr sz="1500" b="0">
+              <a:defRPr sz="1600" b="0">
                 <a:solidFill>
                   <a:srgbClr val="37474F"/>
                 </a:solidFill>
@@ -11614,7 +12609,7 @@
               <a:spcAft>
                 <a:spcPts val="500"/>
               </a:spcAft>
-              <a:defRPr sz="1500" b="0">
+              <a:defRPr sz="1600" b="0">
                 <a:solidFill>
                   <a:srgbClr val="37474F"/>
                 </a:solidFill>
@@ -11633,7 +12628,7 @@
               <a:spcAft>
                 <a:spcPts val="500"/>
               </a:spcAft>
-              <a:defRPr sz="1500" b="0">
+              <a:defRPr sz="1600" b="0">
                 <a:solidFill>
                   <a:srgbClr val="37474F"/>
                 </a:solidFill>
@@ -11906,7 +12901,7 @@
           <a:lstStyle/>
           <a:p>
             <a:pPr>
-              <a:defRPr sz="2400" b="1">
+              <a:defRPr sz="2600" b="1">
                 <a:solidFill>
                   <a:srgbClr val="0D2B45"/>
                 </a:solidFill>
@@ -11928,7 +12923,7 @@
         <p:spPr>
           <a:xfrm>
             <a:off x="502920" y="1554480"/>
-            <a:ext cx="11155680" cy="2331720"/>
+            <a:ext cx="11155680" cy="4800600"/>
           </a:xfrm>
           <a:prstGeom prst="roundRect">
             <a:avLst/>
@@ -11973,7 +12968,7 @@
         <p:spPr>
           <a:xfrm>
             <a:off x="777240" y="1673352"/>
-            <a:ext cx="10424160" cy="2148840"/>
+            <a:ext cx="10424160" cy="4572000"/>
           </a:xfrm>
           <a:prstGeom prst="rect">
             <a:avLst/>
@@ -11993,7 +12988,7 @@
               <a:spcAft>
                 <a:spcPts val="500"/>
               </a:spcAft>
-              <a:defRPr sz="1500" b="0">
+              <a:defRPr sz="1700" b="0">
                 <a:solidFill>
                   <a:srgbClr val="37474F"/>
                 </a:solidFill>
@@ -12012,7 +13007,7 @@
               <a:spcAft>
                 <a:spcPts val="500"/>
               </a:spcAft>
-              <a:defRPr sz="1500" b="0">
+              <a:defRPr sz="1700" b="0">
                 <a:solidFill>
                   <a:srgbClr val="37474F"/>
                 </a:solidFill>
@@ -12031,7 +13026,7 @@
               <a:spcAft>
                 <a:spcPts val="500"/>
               </a:spcAft>
-              <a:defRPr sz="1500" b="0">
+              <a:defRPr sz="1700" b="0">
                 <a:solidFill>
                   <a:srgbClr val="37474F"/>
                 </a:solidFill>
@@ -12050,7 +13045,7 @@
               <a:spcAft>
                 <a:spcPts val="500"/>
               </a:spcAft>
-              <a:defRPr sz="1500" b="0">
+              <a:defRPr sz="1700" b="0">
                 <a:solidFill>
                   <a:srgbClr val="37474F"/>
                 </a:solidFill>
@@ -12069,7 +13064,7 @@
               <a:spcAft>
                 <a:spcPts val="500"/>
               </a:spcAft>
-              <a:defRPr sz="1500" b="0">
+              <a:defRPr sz="1700" b="0">
                 <a:solidFill>
                   <a:srgbClr val="37474F"/>
                 </a:solidFill>
@@ -12289,7 +13284,7 @@
           <a:lstStyle/>
           <a:p>
             <a:pPr>
-              <a:defRPr sz="2800" b="1">
+              <a:defRPr sz="3000" b="1">
                 <a:solidFill>
                   <a:srgbClr val="0D2B45"/>
                 </a:solidFill>
@@ -12311,7 +13306,7 @@
         <p:spPr>
           <a:xfrm>
             <a:off x="502920" y="1344168"/>
-            <a:ext cx="11155680" cy="2331720"/>
+            <a:ext cx="11155680" cy="5010912"/>
           </a:xfrm>
           <a:prstGeom prst="roundRect">
             <a:avLst/>
@@ -12356,7 +13351,7 @@
         <p:spPr>
           <a:xfrm>
             <a:off x="777240" y="1463040"/>
-            <a:ext cx="10424160" cy="2148840"/>
+            <a:ext cx="10424160" cy="4782312"/>
           </a:xfrm>
           <a:prstGeom prst="rect">
             <a:avLst/>
@@ -12376,7 +13371,7 @@
               <a:spcAft>
                 <a:spcPts val="800"/>
               </a:spcAft>
-              <a:defRPr sz="1700" b="0">
+              <a:defRPr sz="1900" b="0">
                 <a:solidFill>
                   <a:srgbClr val="37474F"/>
                 </a:solidFill>
@@ -12395,7 +13390,7 @@
               <a:spcAft>
                 <a:spcPts val="800"/>
               </a:spcAft>
-              <a:defRPr sz="1700" b="0">
+              <a:defRPr sz="1900" b="0">
                 <a:solidFill>
                   <a:srgbClr val="37474F"/>
                 </a:solidFill>
@@ -12414,7 +13409,7 @@
               <a:spcAft>
                 <a:spcPts val="800"/>
               </a:spcAft>
-              <a:defRPr sz="1700" b="0">
+              <a:defRPr sz="1900" b="0">
                 <a:solidFill>
                   <a:srgbClr val="37474F"/>
                 </a:solidFill>
@@ -12433,7 +13428,7 @@
               <a:spcAft>
                 <a:spcPts val="800"/>
               </a:spcAft>
-              <a:defRPr sz="1700" b="0">
+              <a:defRPr sz="1900" b="0">
                 <a:solidFill>
                   <a:srgbClr val="37474F"/>
                 </a:solidFill>
@@ -12452,7 +13447,7 @@
               <a:spcAft>
                 <a:spcPts val="800"/>
               </a:spcAft>
-              <a:defRPr sz="1700" b="0">
+              <a:defRPr sz="1900" b="0">
                 <a:solidFill>
                   <a:srgbClr val="37474F"/>
                 </a:solidFill>
@@ -12689,7 +13684,7 @@
           <a:lstStyle/>
           <a:p>
             <a:pPr>
-              <a:defRPr sz="2600" b="1">
+              <a:defRPr sz="2800" b="1">
                 <a:solidFill>
                   <a:srgbClr val="BF360C"/>
                 </a:solidFill>
@@ -12711,7 +13706,7 @@
         <p:spPr>
           <a:xfrm>
             <a:off x="502920" y="1554480"/>
-            <a:ext cx="11155680" cy="2651759"/>
+            <a:ext cx="11155680" cy="4800600"/>
           </a:xfrm>
           <a:prstGeom prst="roundRect">
             <a:avLst/>
@@ -12756,7 +13751,7 @@
         <p:spPr>
           <a:xfrm>
             <a:off x="777240" y="1673352"/>
-            <a:ext cx="10424160" cy="2468879"/>
+            <a:ext cx="10424160" cy="4572000"/>
           </a:xfrm>
           <a:prstGeom prst="rect">
             <a:avLst/>
@@ -13055,7 +14050,7 @@
           <a:lstStyle/>
           <a:p>
             <a:pPr algn="ctr">
-              <a:defRPr sz="3600" b="1">
+              <a:defRPr sz="3800" b="1">
                 <a:solidFill>
                   <a:srgbClr val="FFFFFF"/>
                 </a:solidFill>
@@ -13091,7 +14086,7 @@
           <a:lstStyle/>
           <a:p>
             <a:pPr algn="ctr">
-              <a:defRPr sz="2000" b="0">
+              <a:defRPr sz="2200" b="0">
                 <a:solidFill>
                   <a:srgbClr val="B2EBF2"/>
                 </a:solidFill>
@@ -13196,7 +14191,7 @@
           <a:lstStyle/>
           <a:p>
             <a:pPr>
-              <a:defRPr sz="2800" b="1">
+              <a:defRPr sz="3000" b="1">
                 <a:solidFill>
                   <a:srgbClr val="0D2B45"/>
                 </a:solidFill>
@@ -13218,7 +14213,7 @@
         <p:spPr>
           <a:xfrm>
             <a:off x="502920" y="1344168"/>
-            <a:ext cx="11155680" cy="2331720"/>
+            <a:ext cx="11155680" cy="5010912"/>
           </a:xfrm>
           <a:prstGeom prst="roundRect">
             <a:avLst/>
@@ -13263,7 +14258,7 @@
         <p:spPr>
           <a:xfrm>
             <a:off x="777240" y="1463040"/>
-            <a:ext cx="10424160" cy="2148840"/>
+            <a:ext cx="10424160" cy="4782312"/>
           </a:xfrm>
           <a:prstGeom prst="rect">
             <a:avLst/>
@@ -13283,7 +14278,7 @@
               <a:spcAft>
                 <a:spcPts val="800"/>
               </a:spcAft>
-              <a:defRPr sz="1300" b="0">
+              <a:defRPr sz="1400" b="0">
                 <a:solidFill>
                   <a:srgbClr val="0D2B45"/>
                 </a:solidFill>
@@ -13302,7 +14297,7 @@
               <a:spcAft>
                 <a:spcPts val="800"/>
               </a:spcAft>
-              <a:defRPr sz="1300" b="0">
+              <a:defRPr sz="1400" b="0">
                 <a:solidFill>
                   <a:srgbClr val="0D2B45"/>
                 </a:solidFill>
@@ -13321,7 +14316,7 @@
               <a:spcAft>
                 <a:spcPts val="800"/>
               </a:spcAft>
-              <a:defRPr sz="1700" b="0">
+              <a:defRPr sz="1900" b="0">
                 <a:solidFill>
                   <a:srgbClr val="37474F"/>
                 </a:solidFill>
@@ -13340,7 +14335,7 @@
               <a:spcAft>
                 <a:spcPts val="800"/>
               </a:spcAft>
-              <a:defRPr sz="1700" b="0">
+              <a:defRPr sz="1900" b="0">
                 <a:solidFill>
                   <a:srgbClr val="37474F"/>
                 </a:solidFill>
@@ -13359,7 +14354,7 @@
               <a:spcAft>
                 <a:spcPts val="800"/>
               </a:spcAft>
-              <a:defRPr sz="1700" b="0">
+              <a:defRPr sz="1900" b="0">
                 <a:solidFill>
                   <a:srgbClr val="37474F"/>
                 </a:solidFill>
@@ -13528,7 +14523,7 @@
         </p:nvSpPr>
         <p:spPr>
           <a:xfrm>
-            <a:off x="594360" y="438912"/>
+            <a:off x="594360" y="347472"/>
             <a:ext cx="10972800" cy="868680"/>
           </a:xfrm>
           <a:prstGeom prst="rect">
@@ -13564,8 +14559,8 @@
         </p:nvSpPr>
         <p:spPr>
           <a:xfrm>
-            <a:off x="2928975" y="1426464"/>
-            <a:ext cx="6333744" cy="4123944"/>
+            <a:off x="1667103" y="1298448"/>
+            <a:ext cx="8857488" cy="5733288"/>
           </a:xfrm>
           <a:prstGeom prst="roundRect">
             <a:avLst/>
@@ -13617,8 +14612,8 @@
         </p:blipFill>
         <p:spPr>
           <a:xfrm>
-            <a:off x="3002127" y="1499616"/>
-            <a:ext cx="6187440" cy="3977639"/>
+            <a:off x="1721967" y="1353312"/>
+            <a:ext cx="8747760" cy="5623560"/>
           </a:xfrm>
           <a:prstGeom prst="rect">
             <a:avLst/>
@@ -13633,7 +14628,7 @@
         </p:nvSpPr>
         <p:spPr>
           <a:xfrm>
-            <a:off x="594360" y="5687568"/>
+            <a:off x="594360" y="7168896"/>
             <a:ext cx="10972800" cy="411480"/>
           </a:xfrm>
           <a:prstGeom prst="rect">
@@ -13648,7 +14643,7 @@
           <a:lstStyle/>
           <a:p>
             <a:pPr>
-              <a:defRPr sz="1100" b="0">
+              <a:defRPr sz="1200" b="0">
                 <a:solidFill>
                   <a:srgbClr val="37474F"/>
                 </a:solidFill>
@@ -13868,7 +14863,7 @@
           <a:lstStyle/>
           <a:p>
             <a:pPr>
-              <a:defRPr sz="2800" b="1">
+              <a:defRPr sz="3000" b="1">
                 <a:solidFill>
                   <a:srgbClr val="0D2B45"/>
                 </a:solidFill>
@@ -13890,7 +14885,7 @@
         <p:spPr>
           <a:xfrm>
             <a:off x="502920" y="1344168"/>
-            <a:ext cx="11155680" cy="2011680"/>
+            <a:ext cx="11155680" cy="5010912"/>
           </a:xfrm>
           <a:prstGeom prst="roundRect">
             <a:avLst/>
@@ -13935,7 +14930,7 @@
         <p:spPr>
           <a:xfrm>
             <a:off x="777240" y="1463040"/>
-            <a:ext cx="10424160" cy="1828800"/>
+            <a:ext cx="10424160" cy="4782312"/>
           </a:xfrm>
           <a:prstGeom prst="rect">
             <a:avLst/>
@@ -13955,7 +14950,7 @@
               <a:spcAft>
                 <a:spcPts val="800"/>
               </a:spcAft>
-              <a:defRPr sz="1300" b="0">
+              <a:defRPr sz="1400" b="0">
                 <a:solidFill>
                   <a:srgbClr val="0D2B45"/>
                 </a:solidFill>
@@ -13974,7 +14969,7 @@
               <a:spcAft>
                 <a:spcPts val="800"/>
               </a:spcAft>
-              <a:defRPr sz="1300" b="0">
+              <a:defRPr sz="1400" b="0">
                 <a:solidFill>
                   <a:srgbClr val="0D2B45"/>
                 </a:solidFill>
@@ -13993,7 +14988,7 @@
               <a:spcAft>
                 <a:spcPts val="800"/>
               </a:spcAft>
-              <a:defRPr sz="1700" b="0">
+              <a:defRPr sz="1900" b="0">
                 <a:solidFill>
                   <a:srgbClr val="37474F"/>
                 </a:solidFill>
@@ -14012,7 +15007,7 @@
               <a:spcAft>
                 <a:spcPts val="800"/>
               </a:spcAft>
-              <a:defRPr sz="1300" b="0">
+              <a:defRPr sz="1400" b="0">
                 <a:solidFill>
                   <a:srgbClr val="0D2B45"/>
                 </a:solidFill>
@@ -14196,7 +15191,7 @@
           <a:lstStyle/>
           <a:p>
             <a:pPr algn="ctr">
-              <a:defRPr sz="3600" b="1">
+              <a:defRPr sz="3800" b="1">
                 <a:solidFill>
                   <a:srgbClr val="FFFFFF"/>
                 </a:solidFill>
@@ -14232,7 +15227,7 @@
           <a:lstStyle/>
           <a:p>
             <a:pPr algn="ctr">
-              <a:defRPr sz="2000" b="0">
+              <a:defRPr sz="2200" b="0">
                 <a:solidFill>
                   <a:srgbClr val="B2EBF2"/>
                 </a:solidFill>
@@ -14337,7 +15332,7 @@
           <a:lstStyle/>
           <a:p>
             <a:pPr>
-              <a:defRPr sz="2800" b="1">
+              <a:defRPr sz="3000" b="1">
                 <a:solidFill>
                   <a:srgbClr val="0D2B45"/>
                 </a:solidFill>
@@ -14359,7 +15354,7 @@
         <p:spPr>
           <a:xfrm>
             <a:off x="502920" y="1344168"/>
-            <a:ext cx="11155680" cy="2011680"/>
+            <a:ext cx="11155680" cy="5010912"/>
           </a:xfrm>
           <a:prstGeom prst="roundRect">
             <a:avLst/>
@@ -14404,7 +15399,7 @@
         <p:spPr>
           <a:xfrm>
             <a:off x="777240" y="1463040"/>
-            <a:ext cx="10424160" cy="1828800"/>
+            <a:ext cx="10424160" cy="4782312"/>
           </a:xfrm>
           <a:prstGeom prst="rect">
             <a:avLst/>
@@ -14424,7 +15419,7 @@
               <a:spcAft>
                 <a:spcPts val="800"/>
               </a:spcAft>
-              <a:defRPr sz="1300" b="0">
+              <a:defRPr sz="1400" b="0">
                 <a:solidFill>
                   <a:srgbClr val="0D2B45"/>
                 </a:solidFill>
@@ -14443,7 +15438,7 @@
               <a:spcAft>
                 <a:spcPts val="800"/>
               </a:spcAft>
-              <a:defRPr sz="1700" b="0">
+              <a:defRPr sz="1900" b="0">
                 <a:solidFill>
                   <a:srgbClr val="37474F"/>
                 </a:solidFill>
@@ -14462,7 +15457,7 @@
               <a:spcAft>
                 <a:spcPts val="800"/>
               </a:spcAft>
-              <a:defRPr sz="1300" b="0">
+              <a:defRPr sz="1400" b="0">
                 <a:solidFill>
                   <a:srgbClr val="0D2B45"/>
                 </a:solidFill>
@@ -14481,7 +15476,7 @@
               <a:spcAft>
                 <a:spcPts val="800"/>
               </a:spcAft>
-              <a:defRPr sz="1700" b="0">
+              <a:defRPr sz="1900" b="0">
                 <a:solidFill>
                   <a:srgbClr val="37474F"/>
                 </a:solidFill>
@@ -14718,7 +15713,7 @@
           <a:lstStyle/>
           <a:p>
             <a:pPr algn="r">
-              <a:defRPr sz="1000" b="0">
+              <a:defRPr sz="1100" b="0">
                 <a:solidFill>
                   <a:srgbClr val="78909C"/>
                 </a:solidFill>
@@ -14754,7 +15749,7 @@
           <a:lstStyle/>
           <a:p>
             <a:pPr>
-              <a:defRPr sz="2400" b="1">
+              <a:defRPr sz="2600" b="1">
                 <a:solidFill>
                   <a:srgbClr val="0D2B45"/>
                 </a:solidFill>
@@ -14776,7 +15771,7 @@
         <p:spPr>
           <a:xfrm>
             <a:off x="502920" y="1554480"/>
-            <a:ext cx="11155680" cy="2651759"/>
+            <a:ext cx="11155680" cy="4800600"/>
           </a:xfrm>
           <a:prstGeom prst="roundRect">
             <a:avLst/>
@@ -14821,7 +15816,7 @@
         <p:spPr>
           <a:xfrm>
             <a:off x="777240" y="1673352"/>
-            <a:ext cx="10424160" cy="2468879"/>
+            <a:ext cx="10424160" cy="4572000"/>
           </a:xfrm>
           <a:prstGeom prst="rect">
             <a:avLst/>
@@ -14841,7 +15836,7 @@
               <a:spcAft>
                 <a:spcPts val="500"/>
               </a:spcAft>
-              <a:defRPr sz="1500" b="0">
+              <a:defRPr sz="1600" b="0">
                 <a:solidFill>
                   <a:srgbClr val="37474F"/>
                 </a:solidFill>
@@ -14860,7 +15855,7 @@
               <a:spcAft>
                 <a:spcPts val="500"/>
               </a:spcAft>
-              <a:defRPr sz="1500" b="0">
+              <a:defRPr sz="1600" b="0">
                 <a:solidFill>
                   <a:srgbClr val="37474F"/>
                 </a:solidFill>
@@ -14879,7 +15874,7 @@
               <a:spcAft>
                 <a:spcPts val="500"/>
               </a:spcAft>
-              <a:defRPr sz="1500" b="0">
+              <a:defRPr sz="1600" b="0">
                 <a:solidFill>
                   <a:srgbClr val="37474F"/>
                 </a:solidFill>
@@ -14898,7 +15893,7 @@
               <a:spcAft>
                 <a:spcPts val="500"/>
               </a:spcAft>
-              <a:defRPr sz="1500" b="0">
+              <a:defRPr sz="1600" b="0">
                 <a:solidFill>
                   <a:srgbClr val="37474F"/>
                 </a:solidFill>
@@ -14917,7 +15912,7 @@
               <a:spcAft>
                 <a:spcPts val="500"/>
               </a:spcAft>
-              <a:defRPr sz="1500" b="0">
+              <a:defRPr sz="1600" b="0">
                 <a:solidFill>
                   <a:srgbClr val="37474F"/>
                 </a:solidFill>
@@ -14936,7 +15931,7 @@
               <a:spcAft>
                 <a:spcPts val="500"/>
               </a:spcAft>
-              <a:defRPr sz="1500" b="0">
+              <a:defRPr sz="1600" b="0">
                 <a:solidFill>
                   <a:srgbClr val="37474F"/>
                 </a:solidFill>
@@ -15141,7 +16136,7 @@
         </p:nvSpPr>
         <p:spPr>
           <a:xfrm>
-            <a:off x="594360" y="438912"/>
+            <a:off x="594360" y="347472"/>
             <a:ext cx="10972800" cy="868680"/>
           </a:xfrm>
           <a:prstGeom prst="rect">
@@ -15177,8 +16172,8 @@
         </p:nvSpPr>
         <p:spPr>
           <a:xfrm>
-            <a:off x="2928975" y="1426464"/>
-            <a:ext cx="6333744" cy="4123944"/>
+            <a:off x="1667103" y="1298448"/>
+            <a:ext cx="8857488" cy="5733288"/>
           </a:xfrm>
           <a:prstGeom prst="roundRect">
             <a:avLst/>
@@ -15230,8 +16225,8 @@
         </p:blipFill>
         <p:spPr>
           <a:xfrm>
-            <a:off x="3002127" y="1499616"/>
-            <a:ext cx="6187440" cy="3977639"/>
+            <a:off x="1721967" y="1353312"/>
+            <a:ext cx="8747760" cy="5623560"/>
           </a:xfrm>
           <a:prstGeom prst="rect">
             <a:avLst/>
@@ -15246,7 +16241,7 @@
         </p:nvSpPr>
         <p:spPr>
           <a:xfrm>
-            <a:off x="594360" y="5687568"/>
+            <a:off x="594360" y="7168896"/>
             <a:ext cx="10972800" cy="411480"/>
           </a:xfrm>
           <a:prstGeom prst="rect">
@@ -15261,7 +16256,7 @@
           <a:lstStyle/>
           <a:p>
             <a:pPr>
-              <a:defRPr sz="1100" b="0">
+              <a:defRPr sz="1200" b="0">
                 <a:solidFill>
                   <a:srgbClr val="37474F"/>
                 </a:solidFill>
@@ -15534,7 +16529,7 @@
           <a:lstStyle/>
           <a:p>
             <a:pPr algn="r">
-              <a:defRPr sz="1000" b="0">
+              <a:defRPr sz="1100" b="0">
                 <a:solidFill>
                   <a:srgbClr val="78909C"/>
                 </a:solidFill>
@@ -15570,7 +16565,7 @@
           <a:lstStyle/>
           <a:p>
             <a:pPr>
-              <a:defRPr sz="2400" b="1">
+              <a:defRPr sz="2600" b="1">
                 <a:solidFill>
                   <a:srgbClr val="0D2B45"/>
                 </a:solidFill>
@@ -15592,7 +16587,7 @@
         <p:spPr>
           <a:xfrm>
             <a:off x="502920" y="1554480"/>
-            <a:ext cx="11155680" cy="2651759"/>
+            <a:ext cx="11155680" cy="4800600"/>
           </a:xfrm>
           <a:prstGeom prst="roundRect">
             <a:avLst/>
@@ -15637,7 +16632,7 @@
         <p:spPr>
           <a:xfrm>
             <a:off x="777240" y="1673352"/>
-            <a:ext cx="10424160" cy="2468879"/>
+            <a:ext cx="10424160" cy="4572000"/>
           </a:xfrm>
           <a:prstGeom prst="rect">
             <a:avLst/>
@@ -15657,7 +16652,7 @@
               <a:spcAft>
                 <a:spcPts val="500"/>
               </a:spcAft>
-              <a:defRPr sz="1500" b="0">
+              <a:defRPr sz="1600" b="0">
                 <a:solidFill>
                   <a:srgbClr val="37474F"/>
                 </a:solidFill>
@@ -15676,7 +16671,7 @@
               <a:spcAft>
                 <a:spcPts val="500"/>
               </a:spcAft>
-              <a:defRPr sz="1500" b="0">
+              <a:defRPr sz="1600" b="0">
                 <a:solidFill>
                   <a:srgbClr val="37474F"/>
                 </a:solidFill>
@@ -15695,7 +16690,7 @@
               <a:spcAft>
                 <a:spcPts val="500"/>
               </a:spcAft>
-              <a:defRPr sz="1500" b="0">
+              <a:defRPr sz="1600" b="0">
                 <a:solidFill>
                   <a:srgbClr val="37474F"/>
                 </a:solidFill>
@@ -15714,7 +16709,7 @@
               <a:spcAft>
                 <a:spcPts val="500"/>
               </a:spcAft>
-              <a:defRPr sz="1500" b="0">
+              <a:defRPr sz="1600" b="0">
                 <a:solidFill>
                   <a:srgbClr val="37474F"/>
                 </a:solidFill>
@@ -15733,7 +16728,7 @@
               <a:spcAft>
                 <a:spcPts val="500"/>
               </a:spcAft>
-              <a:defRPr sz="1500" b="0">
+              <a:defRPr sz="1600" b="0">
                 <a:solidFill>
                   <a:srgbClr val="37474F"/>
                 </a:solidFill>
@@ -15752,7 +16747,7 @@
               <a:spcAft>
                 <a:spcPts val="500"/>
               </a:spcAft>
-              <a:defRPr sz="1500" b="0">
+              <a:defRPr sz="1600" b="0">
                 <a:solidFill>
                   <a:srgbClr val="37474F"/>
                 </a:solidFill>
@@ -15972,7 +16967,7 @@
           <a:lstStyle/>
           <a:p>
             <a:pPr>
-              <a:defRPr sz="2600" b="1">
+              <a:defRPr sz="2800" b="1">
                 <a:solidFill>
                   <a:srgbClr val="0D2B45"/>
                 </a:solidFill>
@@ -16030,7 +17025,7 @@
               <a:spcAft>
                 <a:spcPts val="200"/>
               </a:spcAft>
-              <a:defRPr sz="1100" b="0">
+              <a:defRPr sz="1200" b="0">
                 <a:solidFill>
                   <a:srgbClr val="E2E8F0"/>
                 </a:solidFill>
@@ -16046,7 +17041,7 @@
               <a:spcAft>
                 <a:spcPts val="200"/>
               </a:spcAft>
-              <a:defRPr sz="1100" b="0">
+              <a:defRPr sz="1200" b="0">
                 <a:solidFill>
                   <a:srgbClr val="E2E8F0"/>
                 </a:solidFill>
@@ -16062,7 +17057,7 @@
               <a:spcAft>
                 <a:spcPts val="200"/>
               </a:spcAft>
-              <a:defRPr sz="1100" b="0">
+              <a:defRPr sz="1200" b="0">
                 <a:solidFill>
                   <a:srgbClr val="E2E8F0"/>
                 </a:solidFill>
@@ -16439,7 +17434,7 @@
         </p:nvSpPr>
         <p:spPr>
           <a:xfrm>
-            <a:off x="594360" y="438912"/>
+            <a:off x="594360" y="347472"/>
             <a:ext cx="10972800" cy="868680"/>
           </a:xfrm>
           <a:prstGeom prst="rect">
@@ -16475,8 +17470,8 @@
         </p:nvSpPr>
         <p:spPr>
           <a:xfrm>
-            <a:off x="2928975" y="1426464"/>
-            <a:ext cx="6333744" cy="4123944"/>
+            <a:off x="1667103" y="1298448"/>
+            <a:ext cx="8857488" cy="5733288"/>
           </a:xfrm>
           <a:prstGeom prst="roundRect">
             <a:avLst/>
@@ -16528,8 +17523,8 @@
         </p:blipFill>
         <p:spPr>
           <a:xfrm>
-            <a:off x="3002127" y="1499616"/>
-            <a:ext cx="6187440" cy="3977639"/>
+            <a:off x="1721967" y="1353312"/>
+            <a:ext cx="8747760" cy="5623560"/>
           </a:xfrm>
           <a:prstGeom prst="rect">
             <a:avLst/>
@@ -16544,7 +17539,7 @@
         </p:nvSpPr>
         <p:spPr>
           <a:xfrm>
-            <a:off x="594360" y="5687568"/>
+            <a:off x="594360" y="7168896"/>
             <a:ext cx="10972800" cy="411480"/>
           </a:xfrm>
           <a:prstGeom prst="rect">
@@ -16559,7 +17554,7 @@
           <a:lstStyle/>
           <a:p>
             <a:pPr>
-              <a:defRPr sz="1100" b="0">
+              <a:defRPr sz="1200" b="0">
                 <a:solidFill>
                   <a:srgbClr val="37474F"/>
                 </a:solidFill>
@@ -16832,7 +17827,7 @@
           <a:lstStyle/>
           <a:p>
             <a:pPr algn="r">
-              <a:defRPr sz="1000" b="0">
+              <a:defRPr sz="1100" b="0">
                 <a:solidFill>
                   <a:srgbClr val="78909C"/>
                 </a:solidFill>
@@ -16868,7 +17863,7 @@
           <a:lstStyle/>
           <a:p>
             <a:pPr>
-              <a:defRPr sz="2400" b="1">
+              <a:defRPr sz="2600" b="1">
                 <a:solidFill>
                   <a:srgbClr val="0D2B45"/>
                 </a:solidFill>
@@ -16890,7 +17885,7 @@
         <p:spPr>
           <a:xfrm>
             <a:off x="502920" y="1554480"/>
-            <a:ext cx="11155680" cy="2651759"/>
+            <a:ext cx="11155680" cy="4800600"/>
           </a:xfrm>
           <a:prstGeom prst="roundRect">
             <a:avLst/>
@@ -16935,7 +17930,7 @@
         <p:spPr>
           <a:xfrm>
             <a:off x="777240" y="1673352"/>
-            <a:ext cx="10424160" cy="2468879"/>
+            <a:ext cx="10424160" cy="4572000"/>
           </a:xfrm>
           <a:prstGeom prst="rect">
             <a:avLst/>
@@ -16955,7 +17950,7 @@
               <a:spcAft>
                 <a:spcPts val="500"/>
               </a:spcAft>
-              <a:defRPr sz="1500" b="0">
+              <a:defRPr sz="1600" b="0">
                 <a:solidFill>
                   <a:srgbClr val="37474F"/>
                 </a:solidFill>
@@ -16974,7 +17969,7 @@
               <a:spcAft>
                 <a:spcPts val="500"/>
               </a:spcAft>
-              <a:defRPr sz="1500" b="0">
+              <a:defRPr sz="1600" b="0">
                 <a:solidFill>
                   <a:srgbClr val="37474F"/>
                 </a:solidFill>
@@ -16993,7 +17988,7 @@
               <a:spcAft>
                 <a:spcPts val="500"/>
               </a:spcAft>
-              <a:defRPr sz="1500" b="0">
+              <a:defRPr sz="1600" b="0">
                 <a:solidFill>
                   <a:srgbClr val="37474F"/>
                 </a:solidFill>
@@ -17012,7 +18007,7 @@
               <a:spcAft>
                 <a:spcPts val="500"/>
               </a:spcAft>
-              <a:defRPr sz="1500" b="0">
+              <a:defRPr sz="1600" b="0">
                 <a:solidFill>
                   <a:srgbClr val="37474F"/>
                 </a:solidFill>
@@ -17031,7 +18026,7 @@
               <a:spcAft>
                 <a:spcPts val="500"/>
               </a:spcAft>
-              <a:defRPr sz="1500" b="0">
+              <a:defRPr sz="1600" b="0">
                 <a:solidFill>
                   <a:srgbClr val="37474F"/>
                 </a:solidFill>
@@ -17050,7 +18045,7 @@
               <a:spcAft>
                 <a:spcPts val="500"/>
               </a:spcAft>
-              <a:defRPr sz="1500" b="0">
+              <a:defRPr sz="1600" b="0">
                 <a:solidFill>
                   <a:srgbClr val="37474F"/>
                 </a:solidFill>
@@ -17270,7 +18265,7 @@
           <a:lstStyle/>
           <a:p>
             <a:pPr>
-              <a:defRPr sz="2800" b="1">
+              <a:defRPr sz="3000" b="1">
                 <a:solidFill>
                   <a:srgbClr val="0D2B45"/>
                 </a:solidFill>
@@ -17292,7 +18287,7 @@
         <p:spPr>
           <a:xfrm>
             <a:off x="502920" y="1344168"/>
-            <a:ext cx="11155680" cy="2011680"/>
+            <a:ext cx="11155680" cy="5010912"/>
           </a:xfrm>
           <a:prstGeom prst="roundRect">
             <a:avLst/>
@@ -17337,7 +18332,7 @@
         <p:spPr>
           <a:xfrm>
             <a:off x="777240" y="1463040"/>
-            <a:ext cx="10424160" cy="1828800"/>
+            <a:ext cx="10424160" cy="4782312"/>
           </a:xfrm>
           <a:prstGeom prst="rect">
             <a:avLst/>
@@ -17357,7 +18352,7 @@
               <a:spcAft>
                 <a:spcPts val="800"/>
               </a:spcAft>
-              <a:defRPr sz="1300" b="0">
+              <a:defRPr sz="1400" b="0">
                 <a:solidFill>
                   <a:srgbClr val="0D2B45"/>
                 </a:solidFill>
@@ -17376,7 +18371,7 @@
               <a:spcAft>
                 <a:spcPts val="800"/>
               </a:spcAft>
-              <a:defRPr sz="1700" b="0">
+              <a:defRPr sz="1900" b="0">
                 <a:solidFill>
                   <a:srgbClr val="37474F"/>
                 </a:solidFill>
@@ -17395,7 +18390,7 @@
               <a:spcAft>
                 <a:spcPts val="800"/>
               </a:spcAft>
-              <a:defRPr sz="1700" b="0">
+              <a:defRPr sz="1900" b="0">
                 <a:solidFill>
                   <a:srgbClr val="37474F"/>
                 </a:solidFill>
@@ -17414,7 +18409,7 @@
               <a:spcAft>
                 <a:spcPts val="800"/>
               </a:spcAft>
-              <a:defRPr sz="1300" b="0">
+              <a:defRPr sz="1400" b="0">
                 <a:solidFill>
                   <a:srgbClr val="0D2B45"/>
                 </a:solidFill>
@@ -17598,7 +18593,7 @@
           <a:lstStyle/>
           <a:p>
             <a:pPr>
-              <a:defRPr sz="2800" b="1">
+              <a:defRPr sz="3000" b="1">
                 <a:solidFill>
                   <a:srgbClr val="0D2B45"/>
                 </a:solidFill>
@@ -17620,7 +18615,7 @@
         <p:spPr>
           <a:xfrm>
             <a:off x="502920" y="1344168"/>
-            <a:ext cx="11155680" cy="2011680"/>
+            <a:ext cx="11155680" cy="5010912"/>
           </a:xfrm>
           <a:prstGeom prst="roundRect">
             <a:avLst/>
@@ -17665,7 +18660,7 @@
         <p:spPr>
           <a:xfrm>
             <a:off x="777240" y="1463040"/>
-            <a:ext cx="10424160" cy="1828800"/>
+            <a:ext cx="10424160" cy="4782312"/>
           </a:xfrm>
           <a:prstGeom prst="rect">
             <a:avLst/>
@@ -17685,7 +18680,7 @@
               <a:spcAft>
                 <a:spcPts val="800"/>
               </a:spcAft>
-              <a:defRPr sz="1300" b="0">
+              <a:defRPr sz="1400" b="0">
                 <a:solidFill>
                   <a:srgbClr val="0D2B45"/>
                 </a:solidFill>
@@ -17704,7 +18699,7 @@
               <a:spcAft>
                 <a:spcPts val="800"/>
               </a:spcAft>
-              <a:defRPr sz="1300" b="0">
+              <a:defRPr sz="1400" b="0">
                 <a:solidFill>
                   <a:srgbClr val="0D2B45"/>
                 </a:solidFill>
@@ -17723,7 +18718,7 @@
               <a:spcAft>
                 <a:spcPts val="800"/>
               </a:spcAft>
-              <a:defRPr sz="1700" b="0">
+              <a:defRPr sz="1900" b="0">
                 <a:solidFill>
                   <a:srgbClr val="37474F"/>
                 </a:solidFill>
@@ -17742,7 +18737,7 @@
               <a:spcAft>
                 <a:spcPts val="800"/>
               </a:spcAft>
-              <a:defRPr sz="1700" b="0">
+              <a:defRPr sz="1900" b="0">
                 <a:solidFill>
                   <a:srgbClr val="37474F"/>
                 </a:solidFill>
@@ -17979,7 +18974,7 @@
           <a:lstStyle/>
           <a:p>
             <a:pPr algn="r">
-              <a:defRPr sz="1000" b="0">
+              <a:defRPr sz="1100" b="0">
                 <a:solidFill>
                   <a:srgbClr val="78909C"/>
                 </a:solidFill>
@@ -18015,7 +19010,7 @@
           <a:lstStyle/>
           <a:p>
             <a:pPr>
-              <a:defRPr sz="2400" b="1">
+              <a:defRPr sz="2600" b="1">
                 <a:solidFill>
                   <a:srgbClr val="0D2B45"/>
                 </a:solidFill>
@@ -18037,7 +19032,7 @@
         <p:spPr>
           <a:xfrm>
             <a:off x="502920" y="1554480"/>
-            <a:ext cx="11155680" cy="2651759"/>
+            <a:ext cx="11155680" cy="4800600"/>
           </a:xfrm>
           <a:prstGeom prst="roundRect">
             <a:avLst/>
@@ -18082,7 +19077,7 @@
         <p:spPr>
           <a:xfrm>
             <a:off x="777240" y="1673352"/>
-            <a:ext cx="10424160" cy="2468879"/>
+            <a:ext cx="10424160" cy="4572000"/>
           </a:xfrm>
           <a:prstGeom prst="rect">
             <a:avLst/>
@@ -18102,7 +19097,7 @@
               <a:spcAft>
                 <a:spcPts val="500"/>
               </a:spcAft>
-              <a:defRPr sz="1500" b="0">
+              <a:defRPr sz="1600" b="0">
                 <a:solidFill>
                   <a:srgbClr val="37474F"/>
                 </a:solidFill>
@@ -18121,7 +19116,7 @@
               <a:spcAft>
                 <a:spcPts val="500"/>
               </a:spcAft>
-              <a:defRPr sz="1500" b="0">
+              <a:defRPr sz="1600" b="0">
                 <a:solidFill>
                   <a:srgbClr val="37474F"/>
                 </a:solidFill>
@@ -18140,7 +19135,7 @@
               <a:spcAft>
                 <a:spcPts val="500"/>
               </a:spcAft>
-              <a:defRPr sz="1500" b="0">
+              <a:defRPr sz="1600" b="0">
                 <a:solidFill>
                   <a:srgbClr val="37474F"/>
                 </a:solidFill>
@@ -18159,7 +19154,7 @@
               <a:spcAft>
                 <a:spcPts val="500"/>
               </a:spcAft>
-              <a:defRPr sz="1500" b="0">
+              <a:defRPr sz="1600" b="0">
                 <a:solidFill>
                   <a:srgbClr val="37474F"/>
                 </a:solidFill>
@@ -18178,7 +19173,7 @@
               <a:spcAft>
                 <a:spcPts val="500"/>
               </a:spcAft>
-              <a:defRPr sz="1500" b="0">
+              <a:defRPr sz="1600" b="0">
                 <a:solidFill>
                   <a:srgbClr val="37474F"/>
                 </a:solidFill>
@@ -18197,7 +19192,7 @@
               <a:spcAft>
                 <a:spcPts val="500"/>
               </a:spcAft>
-              <a:defRPr sz="1500" b="0">
+              <a:defRPr sz="1600" b="0">
                 <a:solidFill>
                   <a:srgbClr val="37474F"/>
                 </a:solidFill>
@@ -18402,7 +19397,7 @@
         </p:nvSpPr>
         <p:spPr>
           <a:xfrm>
-            <a:off x="594360" y="438912"/>
+            <a:off x="594360" y="347472"/>
             <a:ext cx="10972800" cy="868680"/>
           </a:xfrm>
           <a:prstGeom prst="rect">
@@ -18438,8 +19433,8 @@
         </p:nvSpPr>
         <p:spPr>
           <a:xfrm>
-            <a:off x="2928975" y="1426464"/>
-            <a:ext cx="6333744" cy="4123944"/>
+            <a:off x="1667103" y="1298448"/>
+            <a:ext cx="8857488" cy="5733288"/>
           </a:xfrm>
           <a:prstGeom prst="roundRect">
             <a:avLst/>
@@ -18491,8 +19486,8 @@
         </p:blipFill>
         <p:spPr>
           <a:xfrm>
-            <a:off x="3002127" y="1499616"/>
-            <a:ext cx="6187440" cy="3977639"/>
+            <a:off x="1721967" y="1353312"/>
+            <a:ext cx="8747760" cy="5623560"/>
           </a:xfrm>
           <a:prstGeom prst="rect">
             <a:avLst/>
@@ -18507,7 +19502,7 @@
         </p:nvSpPr>
         <p:spPr>
           <a:xfrm>
-            <a:off x="594360" y="5687568"/>
+            <a:off x="594360" y="7168896"/>
             <a:ext cx="10972800" cy="411480"/>
           </a:xfrm>
           <a:prstGeom prst="rect">
@@ -18522,7 +19517,7 @@
           <a:lstStyle/>
           <a:p>
             <a:pPr>
-              <a:defRPr sz="1100" b="0">
+              <a:defRPr sz="1200" b="0">
                 <a:solidFill>
                   <a:srgbClr val="37474F"/>
                 </a:solidFill>
@@ -18795,7 +19790,7 @@
           <a:lstStyle/>
           <a:p>
             <a:pPr algn="r">
-              <a:defRPr sz="1000" b="0">
+              <a:defRPr sz="1100" b="0">
                 <a:solidFill>
                   <a:srgbClr val="78909C"/>
                 </a:solidFill>
@@ -18831,7 +19826,7 @@
           <a:lstStyle/>
           <a:p>
             <a:pPr>
-              <a:defRPr sz="2400" b="1">
+              <a:defRPr sz="2600" b="1">
                 <a:solidFill>
                   <a:srgbClr val="0D2B45"/>
                 </a:solidFill>
@@ -18853,7 +19848,7 @@
         <p:spPr>
           <a:xfrm>
             <a:off x="502920" y="1554480"/>
-            <a:ext cx="11155680" cy="2651759"/>
+            <a:ext cx="11155680" cy="4800600"/>
           </a:xfrm>
           <a:prstGeom prst="roundRect">
             <a:avLst/>
@@ -18898,7 +19893,7 @@
         <p:spPr>
           <a:xfrm>
             <a:off x="777240" y="1673352"/>
-            <a:ext cx="10424160" cy="2468879"/>
+            <a:ext cx="10424160" cy="4572000"/>
           </a:xfrm>
           <a:prstGeom prst="rect">
             <a:avLst/>
@@ -18918,7 +19913,7 @@
               <a:spcAft>
                 <a:spcPts val="500"/>
               </a:spcAft>
-              <a:defRPr sz="1500" b="0">
+              <a:defRPr sz="1600" b="0">
                 <a:solidFill>
                   <a:srgbClr val="37474F"/>
                 </a:solidFill>
@@ -18937,7 +19932,7 @@
               <a:spcAft>
                 <a:spcPts val="500"/>
               </a:spcAft>
-              <a:defRPr sz="1500" b="0">
+              <a:defRPr sz="1600" b="0">
                 <a:solidFill>
                   <a:srgbClr val="37474F"/>
                 </a:solidFill>
@@ -18956,7 +19951,7 @@
               <a:spcAft>
                 <a:spcPts val="500"/>
               </a:spcAft>
-              <a:defRPr sz="1500" b="0">
+              <a:defRPr sz="1600" b="0">
                 <a:solidFill>
                   <a:srgbClr val="37474F"/>
                 </a:solidFill>
@@ -18975,7 +19970,7 @@
               <a:spcAft>
                 <a:spcPts val="500"/>
               </a:spcAft>
-              <a:defRPr sz="1500" b="0">
+              <a:defRPr sz="1600" b="0">
                 <a:solidFill>
                   <a:srgbClr val="37474F"/>
                 </a:solidFill>
@@ -18994,7 +19989,7 @@
               <a:spcAft>
                 <a:spcPts val="500"/>
               </a:spcAft>
-              <a:defRPr sz="1500" b="0">
+              <a:defRPr sz="1600" b="0">
                 <a:solidFill>
                   <a:srgbClr val="37474F"/>
                 </a:solidFill>
@@ -19013,7 +20008,7 @@
               <a:spcAft>
                 <a:spcPts val="500"/>
               </a:spcAft>
-              <a:defRPr sz="1500" b="0">
+              <a:defRPr sz="1600" b="0">
                 <a:solidFill>
                   <a:srgbClr val="37474F"/>
                 </a:solidFill>
@@ -19286,7 +20281,7 @@
           <a:lstStyle/>
           <a:p>
             <a:pPr algn="r">
-              <a:defRPr sz="1000" b="0">
+              <a:defRPr sz="1100" b="0">
                 <a:solidFill>
                   <a:srgbClr val="78909C"/>
                 </a:solidFill>
@@ -19322,7 +20317,7 @@
           <a:lstStyle/>
           <a:p>
             <a:pPr>
-              <a:defRPr sz="2400" b="1">
+              <a:defRPr sz="2600" b="1">
                 <a:solidFill>
                   <a:srgbClr val="0D2B45"/>
                 </a:solidFill>
@@ -19344,7 +20339,7 @@
         <p:spPr>
           <a:xfrm>
             <a:off x="502920" y="1554480"/>
-            <a:ext cx="11155680" cy="2651759"/>
+            <a:ext cx="11155680" cy="4800600"/>
           </a:xfrm>
           <a:prstGeom prst="roundRect">
             <a:avLst/>
@@ -19389,7 +20384,7 @@
         <p:spPr>
           <a:xfrm>
             <a:off x="777240" y="1673352"/>
-            <a:ext cx="10424160" cy="2468879"/>
+            <a:ext cx="10424160" cy="4572000"/>
           </a:xfrm>
           <a:prstGeom prst="rect">
             <a:avLst/>
@@ -19409,7 +20404,7 @@
               <a:spcAft>
                 <a:spcPts val="500"/>
               </a:spcAft>
-              <a:defRPr sz="1500" b="0">
+              <a:defRPr sz="1600" b="0">
                 <a:solidFill>
                   <a:srgbClr val="37474F"/>
                 </a:solidFill>
@@ -19428,7 +20423,7 @@
               <a:spcAft>
                 <a:spcPts val="500"/>
               </a:spcAft>
-              <a:defRPr sz="1500" b="0">
+              <a:defRPr sz="1600" b="0">
                 <a:solidFill>
                   <a:srgbClr val="37474F"/>
                 </a:solidFill>
@@ -19447,7 +20442,7 @@
               <a:spcAft>
                 <a:spcPts val="500"/>
               </a:spcAft>
-              <a:defRPr sz="1500" b="0">
+              <a:defRPr sz="1600" b="0">
                 <a:solidFill>
                   <a:srgbClr val="37474F"/>
                 </a:solidFill>
@@ -19466,7 +20461,7 @@
               <a:spcAft>
                 <a:spcPts val="500"/>
               </a:spcAft>
-              <a:defRPr sz="1500" b="0">
+              <a:defRPr sz="1600" b="0">
                 <a:solidFill>
                   <a:srgbClr val="37474F"/>
                 </a:solidFill>
@@ -19485,7 +20480,7 @@
               <a:spcAft>
                 <a:spcPts val="500"/>
               </a:spcAft>
-              <a:defRPr sz="1500" b="0">
+              <a:defRPr sz="1600" b="0">
                 <a:solidFill>
                   <a:srgbClr val="37474F"/>
                 </a:solidFill>
@@ -19504,7 +20499,7 @@
               <a:spcAft>
                 <a:spcPts val="500"/>
               </a:spcAft>
-              <a:defRPr sz="1500" b="0">
+              <a:defRPr sz="1600" b="0">
                 <a:solidFill>
                   <a:srgbClr val="37474F"/>
                 </a:solidFill>
@@ -19777,7 +20772,7 @@
           <a:lstStyle/>
           <a:p>
             <a:pPr algn="r">
-              <a:defRPr sz="1000" b="0">
+              <a:defRPr sz="1100" b="0">
                 <a:solidFill>
                   <a:srgbClr val="78909C"/>
                 </a:solidFill>
@@ -19813,7 +20808,7 @@
           <a:lstStyle/>
           <a:p>
             <a:pPr>
-              <a:defRPr sz="2400" b="1">
+              <a:defRPr sz="2600" b="1">
                 <a:solidFill>
                   <a:srgbClr val="0D2B45"/>
                 </a:solidFill>
@@ -19835,7 +20830,7 @@
         <p:spPr>
           <a:xfrm>
             <a:off x="502920" y="1554480"/>
-            <a:ext cx="11155680" cy="2651759"/>
+            <a:ext cx="11155680" cy="4800600"/>
           </a:xfrm>
           <a:prstGeom prst="roundRect">
             <a:avLst/>
@@ -19880,7 +20875,7 @@
         <p:spPr>
           <a:xfrm>
             <a:off x="777240" y="1673352"/>
-            <a:ext cx="10424160" cy="2468879"/>
+            <a:ext cx="10424160" cy="4572000"/>
           </a:xfrm>
           <a:prstGeom prst="rect">
             <a:avLst/>
@@ -19900,7 +20895,7 @@
               <a:spcAft>
                 <a:spcPts val="500"/>
               </a:spcAft>
-              <a:defRPr sz="1500" b="0">
+              <a:defRPr sz="1600" b="0">
                 <a:solidFill>
                   <a:srgbClr val="37474F"/>
                 </a:solidFill>
@@ -19919,7 +20914,7 @@
               <a:spcAft>
                 <a:spcPts val="500"/>
               </a:spcAft>
-              <a:defRPr sz="1500" b="0">
+              <a:defRPr sz="1600" b="0">
                 <a:solidFill>
                   <a:srgbClr val="37474F"/>
                 </a:solidFill>
@@ -19938,7 +20933,7 @@
               <a:spcAft>
                 <a:spcPts val="500"/>
               </a:spcAft>
-              <a:defRPr sz="1500" b="0">
+              <a:defRPr sz="1600" b="0">
                 <a:solidFill>
                   <a:srgbClr val="37474F"/>
                 </a:solidFill>
@@ -19957,7 +20952,7 @@
               <a:spcAft>
                 <a:spcPts val="500"/>
               </a:spcAft>
-              <a:defRPr sz="1500" b="0">
+              <a:defRPr sz="1600" b="0">
                 <a:solidFill>
                   <a:srgbClr val="37474F"/>
                 </a:solidFill>
@@ -19976,7 +20971,7 @@
               <a:spcAft>
                 <a:spcPts val="500"/>
               </a:spcAft>
-              <a:defRPr sz="1500" b="0">
+              <a:defRPr sz="1600" b="0">
                 <a:solidFill>
                   <a:srgbClr val="37474F"/>
                 </a:solidFill>
@@ -19995,7 +20990,7 @@
               <a:spcAft>
                 <a:spcPts val="500"/>
               </a:spcAft>
-              <a:defRPr sz="1500" b="0">
+              <a:defRPr sz="1600" b="0">
                 <a:solidFill>
                   <a:srgbClr val="37474F"/>
                 </a:solidFill>
@@ -20268,7 +21263,7 @@
           <a:lstStyle/>
           <a:p>
             <a:pPr algn="r">
-              <a:defRPr sz="1000" b="0">
+              <a:defRPr sz="1100" b="0">
                 <a:solidFill>
                   <a:srgbClr val="78909C"/>
                 </a:solidFill>
@@ -20304,7 +21299,7 @@
           <a:lstStyle/>
           <a:p>
             <a:pPr>
-              <a:defRPr sz="2400" b="1">
+              <a:defRPr sz="2600" b="1">
                 <a:solidFill>
                   <a:srgbClr val="0D2B45"/>
                 </a:solidFill>
@@ -20326,7 +21321,7 @@
         <p:spPr>
           <a:xfrm>
             <a:off x="502920" y="1554480"/>
-            <a:ext cx="11155680" cy="2651759"/>
+            <a:ext cx="11155680" cy="4800600"/>
           </a:xfrm>
           <a:prstGeom prst="roundRect">
             <a:avLst/>
@@ -20371,7 +21366,7 @@
         <p:spPr>
           <a:xfrm>
             <a:off x="777240" y="1673352"/>
-            <a:ext cx="10424160" cy="2468879"/>
+            <a:ext cx="10424160" cy="4572000"/>
           </a:xfrm>
           <a:prstGeom prst="rect">
             <a:avLst/>
@@ -20391,7 +21386,7 @@
               <a:spcAft>
                 <a:spcPts val="500"/>
               </a:spcAft>
-              <a:defRPr sz="1500" b="0">
+              <a:defRPr sz="1600" b="0">
                 <a:solidFill>
                   <a:srgbClr val="37474F"/>
                 </a:solidFill>
@@ -20410,7 +21405,7 @@
               <a:spcAft>
                 <a:spcPts val="500"/>
               </a:spcAft>
-              <a:defRPr sz="1500" b="0">
+              <a:defRPr sz="1600" b="0">
                 <a:solidFill>
                   <a:srgbClr val="37474F"/>
                 </a:solidFill>
@@ -20429,7 +21424,7 @@
               <a:spcAft>
                 <a:spcPts val="500"/>
               </a:spcAft>
-              <a:defRPr sz="1500" b="0">
+              <a:defRPr sz="1600" b="0">
                 <a:solidFill>
                   <a:srgbClr val="37474F"/>
                 </a:solidFill>
@@ -20448,7 +21443,7 @@
               <a:spcAft>
                 <a:spcPts val="500"/>
               </a:spcAft>
-              <a:defRPr sz="1500" b="0">
+              <a:defRPr sz="1600" b="0">
                 <a:solidFill>
                   <a:srgbClr val="37474F"/>
                 </a:solidFill>
@@ -20467,7 +21462,7 @@
               <a:spcAft>
                 <a:spcPts val="500"/>
               </a:spcAft>
-              <a:defRPr sz="1500" b="0">
+              <a:defRPr sz="1600" b="0">
                 <a:solidFill>
                   <a:srgbClr val="37474F"/>
                 </a:solidFill>
@@ -20486,7 +21481,7 @@
               <a:spcAft>
                 <a:spcPts val="500"/>
               </a:spcAft>
-              <a:defRPr sz="1500" b="0">
+              <a:defRPr sz="1600" b="0">
                 <a:solidFill>
                   <a:srgbClr val="37474F"/>
                 </a:solidFill>
@@ -20759,7 +21754,7 @@
           <a:lstStyle/>
           <a:p>
             <a:pPr algn="r">
-              <a:defRPr sz="1000" b="0">
+              <a:defRPr sz="1100" b="0">
                 <a:solidFill>
                   <a:srgbClr val="78909C"/>
                 </a:solidFill>
@@ -20795,7 +21790,7 @@
           <a:lstStyle/>
           <a:p>
             <a:pPr>
-              <a:defRPr sz="2400" b="1">
+              <a:defRPr sz="2600" b="1">
                 <a:solidFill>
                   <a:srgbClr val="0D2B45"/>
                 </a:solidFill>
@@ -20817,7 +21812,7 @@
         <p:spPr>
           <a:xfrm>
             <a:off x="502920" y="1554480"/>
-            <a:ext cx="11155680" cy="2651759"/>
+            <a:ext cx="11155680" cy="4800600"/>
           </a:xfrm>
           <a:prstGeom prst="roundRect">
             <a:avLst/>
@@ -20862,7 +21857,7 @@
         <p:spPr>
           <a:xfrm>
             <a:off x="777240" y="1673352"/>
-            <a:ext cx="10424160" cy="2468879"/>
+            <a:ext cx="10424160" cy="4572000"/>
           </a:xfrm>
           <a:prstGeom prst="rect">
             <a:avLst/>
@@ -20882,7 +21877,7 @@
               <a:spcAft>
                 <a:spcPts val="500"/>
               </a:spcAft>
-              <a:defRPr sz="1500" b="0">
+              <a:defRPr sz="1600" b="0">
                 <a:solidFill>
                   <a:srgbClr val="37474F"/>
                 </a:solidFill>
@@ -20901,7 +21896,7 @@
               <a:spcAft>
                 <a:spcPts val="500"/>
               </a:spcAft>
-              <a:defRPr sz="1500" b="0">
+              <a:defRPr sz="1600" b="0">
                 <a:solidFill>
                   <a:srgbClr val="37474F"/>
                 </a:solidFill>
@@ -20920,7 +21915,7 @@
               <a:spcAft>
                 <a:spcPts val="500"/>
               </a:spcAft>
-              <a:defRPr sz="1500" b="0">
+              <a:defRPr sz="1600" b="0">
                 <a:solidFill>
                   <a:srgbClr val="37474F"/>
                 </a:solidFill>
@@ -20939,7 +21934,7 @@
               <a:spcAft>
                 <a:spcPts val="500"/>
               </a:spcAft>
-              <a:defRPr sz="1500" b="0">
+              <a:defRPr sz="1600" b="0">
                 <a:solidFill>
                   <a:srgbClr val="37474F"/>
                 </a:solidFill>
@@ -20958,7 +21953,7 @@
               <a:spcAft>
                 <a:spcPts val="500"/>
               </a:spcAft>
-              <a:defRPr sz="1500" b="0">
+              <a:defRPr sz="1600" b="0">
                 <a:solidFill>
                   <a:srgbClr val="37474F"/>
                 </a:solidFill>
@@ -20977,7 +21972,7 @@
               <a:spcAft>
                 <a:spcPts val="500"/>
               </a:spcAft>
-              <a:defRPr sz="1500" b="0">
+              <a:defRPr sz="1600" b="0">
                 <a:solidFill>
                   <a:srgbClr val="37474F"/>
                 </a:solidFill>
@@ -21250,7 +22245,7 @@
           <a:lstStyle/>
           <a:p>
             <a:pPr algn="r">
-              <a:defRPr sz="1000" b="0">
+              <a:defRPr sz="1100" b="0">
                 <a:solidFill>
                   <a:srgbClr val="78909C"/>
                 </a:solidFill>
@@ -21286,7 +22281,7 @@
           <a:lstStyle/>
           <a:p>
             <a:pPr>
-              <a:defRPr sz="2400" b="1">
+              <a:defRPr sz="2600" b="1">
                 <a:solidFill>
                   <a:srgbClr val="0D2B45"/>
                 </a:solidFill>
@@ -21308,7 +22303,7 @@
         <p:spPr>
           <a:xfrm>
             <a:off x="502920" y="1554480"/>
-            <a:ext cx="11155680" cy="2651759"/>
+            <a:ext cx="11155680" cy="4800600"/>
           </a:xfrm>
           <a:prstGeom prst="roundRect">
             <a:avLst/>
@@ -21353,7 +22348,7 @@
         <p:spPr>
           <a:xfrm>
             <a:off x="777240" y="1673352"/>
-            <a:ext cx="10424160" cy="2468879"/>
+            <a:ext cx="10424160" cy="4572000"/>
           </a:xfrm>
           <a:prstGeom prst="rect">
             <a:avLst/>
@@ -21373,7 +22368,7 @@
               <a:spcAft>
                 <a:spcPts val="500"/>
               </a:spcAft>
-              <a:defRPr sz="1500" b="0">
+              <a:defRPr sz="1600" b="0">
                 <a:solidFill>
                   <a:srgbClr val="37474F"/>
                 </a:solidFill>
@@ -21392,7 +22387,7 @@
               <a:spcAft>
                 <a:spcPts val="500"/>
               </a:spcAft>
-              <a:defRPr sz="1500" b="0">
+              <a:defRPr sz="1600" b="0">
                 <a:solidFill>
                   <a:srgbClr val="37474F"/>
                 </a:solidFill>
@@ -21411,7 +22406,7 @@
               <a:spcAft>
                 <a:spcPts val="500"/>
               </a:spcAft>
-              <a:defRPr sz="1500" b="0">
+              <a:defRPr sz="1600" b="0">
                 <a:solidFill>
                   <a:srgbClr val="37474F"/>
                 </a:solidFill>
@@ -21430,7 +22425,7 @@
               <a:spcAft>
                 <a:spcPts val="500"/>
               </a:spcAft>
-              <a:defRPr sz="1500" b="0">
+              <a:defRPr sz="1600" b="0">
                 <a:solidFill>
                   <a:srgbClr val="37474F"/>
                 </a:solidFill>
@@ -21449,7 +22444,7 @@
               <a:spcAft>
                 <a:spcPts val="500"/>
               </a:spcAft>
-              <a:defRPr sz="1500" b="0">
+              <a:defRPr sz="1600" b="0">
                 <a:solidFill>
                   <a:srgbClr val="37474F"/>
                 </a:solidFill>
@@ -21468,7 +22463,7 @@
               <a:spcAft>
                 <a:spcPts val="500"/>
               </a:spcAft>
-              <a:defRPr sz="1500" b="0">
+              <a:defRPr sz="1600" b="0">
                 <a:solidFill>
                   <a:srgbClr val="37474F"/>
                 </a:solidFill>
@@ -21741,7 +22736,7 @@
           <a:lstStyle/>
           <a:p>
             <a:pPr algn="r">
-              <a:defRPr sz="1000" b="0">
+              <a:defRPr sz="1100" b="0">
                 <a:solidFill>
                   <a:srgbClr val="78909C"/>
                 </a:solidFill>
@@ -21777,7 +22772,7 @@
           <a:lstStyle/>
           <a:p>
             <a:pPr>
-              <a:defRPr sz="2400" b="1">
+              <a:defRPr sz="2600" b="1">
                 <a:solidFill>
                   <a:srgbClr val="0D2B45"/>
                 </a:solidFill>
@@ -21799,7 +22794,7 @@
         <p:spPr>
           <a:xfrm>
             <a:off x="502920" y="1554480"/>
-            <a:ext cx="11155680" cy="2651759"/>
+            <a:ext cx="11155680" cy="4800600"/>
           </a:xfrm>
           <a:prstGeom prst="roundRect">
             <a:avLst/>
@@ -21844,7 +22839,7 @@
         <p:spPr>
           <a:xfrm>
             <a:off x="777240" y="1673352"/>
-            <a:ext cx="10424160" cy="2468879"/>
+            <a:ext cx="10424160" cy="4572000"/>
           </a:xfrm>
           <a:prstGeom prst="rect">
             <a:avLst/>
@@ -21864,7 +22859,7 @@
               <a:spcAft>
                 <a:spcPts val="500"/>
               </a:spcAft>
-              <a:defRPr sz="1500" b="0">
+              <a:defRPr sz="1600" b="0">
                 <a:solidFill>
                   <a:srgbClr val="37474F"/>
                 </a:solidFill>
@@ -21883,7 +22878,7 @@
               <a:spcAft>
                 <a:spcPts val="500"/>
               </a:spcAft>
-              <a:defRPr sz="1500" b="0">
+              <a:defRPr sz="1600" b="0">
                 <a:solidFill>
                   <a:srgbClr val="37474F"/>
                 </a:solidFill>
@@ -21902,7 +22897,7 @@
               <a:spcAft>
                 <a:spcPts val="500"/>
               </a:spcAft>
-              <a:defRPr sz="1500" b="0">
+              <a:defRPr sz="1600" b="0">
                 <a:solidFill>
                   <a:srgbClr val="37474F"/>
                 </a:solidFill>
@@ -21921,7 +22916,7 @@
               <a:spcAft>
                 <a:spcPts val="500"/>
               </a:spcAft>
-              <a:defRPr sz="1500" b="0">
+              <a:defRPr sz="1600" b="0">
                 <a:solidFill>
                   <a:srgbClr val="37474F"/>
                 </a:solidFill>
@@ -21940,7 +22935,7 @@
               <a:spcAft>
                 <a:spcPts val="500"/>
               </a:spcAft>
-              <a:defRPr sz="1500" b="0">
+              <a:defRPr sz="1600" b="0">
                 <a:solidFill>
                   <a:srgbClr val="37474F"/>
                 </a:solidFill>
@@ -21959,7 +22954,7 @@
               <a:spcAft>
                 <a:spcPts val="500"/>
               </a:spcAft>
-              <a:defRPr sz="1500" b="0">
+              <a:defRPr sz="1600" b="0">
                 <a:solidFill>
                   <a:srgbClr val="37474F"/>
                 </a:solidFill>
@@ -22232,7 +23227,7 @@
           <a:lstStyle/>
           <a:p>
             <a:pPr algn="r">
-              <a:defRPr sz="1000" b="0">
+              <a:defRPr sz="1100" b="0">
                 <a:solidFill>
                   <a:srgbClr val="78909C"/>
                 </a:solidFill>
@@ -22268,7 +23263,7 @@
           <a:lstStyle/>
           <a:p>
             <a:pPr>
-              <a:defRPr sz="2400" b="1">
+              <a:defRPr sz="2600" b="1">
                 <a:solidFill>
                   <a:srgbClr val="0D2B45"/>
                 </a:solidFill>
@@ -22290,7 +23285,7 @@
         <p:spPr>
           <a:xfrm>
             <a:off x="502920" y="1554480"/>
-            <a:ext cx="11155680" cy="2651759"/>
+            <a:ext cx="11155680" cy="4800600"/>
           </a:xfrm>
           <a:prstGeom prst="roundRect">
             <a:avLst/>
@@ -22335,7 +23330,7 @@
         <p:spPr>
           <a:xfrm>
             <a:off x="777240" y="1673352"/>
-            <a:ext cx="10424160" cy="2468879"/>
+            <a:ext cx="10424160" cy="4572000"/>
           </a:xfrm>
           <a:prstGeom prst="rect">
             <a:avLst/>
@@ -22355,7 +23350,7 @@
               <a:spcAft>
                 <a:spcPts val="500"/>
               </a:spcAft>
-              <a:defRPr sz="1500" b="0">
+              <a:defRPr sz="1600" b="0">
                 <a:solidFill>
                   <a:srgbClr val="37474F"/>
                 </a:solidFill>
@@ -22374,7 +23369,7 @@
               <a:spcAft>
                 <a:spcPts val="500"/>
               </a:spcAft>
-              <a:defRPr sz="1500" b="0">
+              <a:defRPr sz="1600" b="0">
                 <a:solidFill>
                   <a:srgbClr val="37474F"/>
                 </a:solidFill>
@@ -22393,7 +23388,7 @@
               <a:spcAft>
                 <a:spcPts val="500"/>
               </a:spcAft>
-              <a:defRPr sz="1500" b="0">
+              <a:defRPr sz="1600" b="0">
                 <a:solidFill>
                   <a:srgbClr val="37474F"/>
                 </a:solidFill>
@@ -22412,7 +23407,7 @@
               <a:spcAft>
                 <a:spcPts val="500"/>
               </a:spcAft>
-              <a:defRPr sz="1500" b="0">
+              <a:defRPr sz="1600" b="0">
                 <a:solidFill>
                   <a:srgbClr val="37474F"/>
                 </a:solidFill>
@@ -22431,7 +23426,7 @@
               <a:spcAft>
                 <a:spcPts val="500"/>
               </a:spcAft>
-              <a:defRPr sz="1500" b="0">
+              <a:defRPr sz="1600" b="0">
                 <a:solidFill>
                   <a:srgbClr val="37474F"/>
                 </a:solidFill>
@@ -22450,7 +23445,7 @@
               <a:spcAft>
                 <a:spcPts val="500"/>
               </a:spcAft>
-              <a:defRPr sz="1500" b="0">
+              <a:defRPr sz="1600" b="0">
                 <a:solidFill>
                   <a:srgbClr val="37474F"/>
                 </a:solidFill>
@@ -22670,7 +23665,7 @@
           <a:lstStyle/>
           <a:p>
             <a:pPr>
-              <a:defRPr sz="2800" b="1">
+              <a:defRPr sz="3000" b="1">
                 <a:solidFill>
                   <a:srgbClr val="0D2B45"/>
                 </a:solidFill>
@@ -22692,7 +23687,7 @@
         <p:spPr>
           <a:xfrm>
             <a:off x="502920" y="1344168"/>
-            <a:ext cx="11155680" cy="1691639"/>
+            <a:ext cx="11155680" cy="5010912"/>
           </a:xfrm>
           <a:prstGeom prst="roundRect">
             <a:avLst/>
@@ -22737,7 +23732,7 @@
         <p:spPr>
           <a:xfrm>
             <a:off x="777240" y="1463040"/>
-            <a:ext cx="10424160" cy="1508759"/>
+            <a:ext cx="10424160" cy="4782312"/>
           </a:xfrm>
           <a:prstGeom prst="rect">
             <a:avLst/>
@@ -22757,7 +23752,7 @@
               <a:spcAft>
                 <a:spcPts val="800"/>
               </a:spcAft>
-              <a:defRPr sz="1700" b="0">
+              <a:defRPr sz="1900" b="0">
                 <a:solidFill>
                   <a:srgbClr val="37474F"/>
                 </a:solidFill>
@@ -22776,7 +23771,7 @@
               <a:spcAft>
                 <a:spcPts val="800"/>
               </a:spcAft>
-              <a:defRPr sz="1700" b="0">
+              <a:defRPr sz="1900" b="0">
                 <a:solidFill>
                   <a:srgbClr val="37474F"/>
                 </a:solidFill>
@@ -22795,7 +23790,7 @@
               <a:spcAft>
                 <a:spcPts val="800"/>
               </a:spcAft>
-              <a:defRPr sz="1700" b="0">
+              <a:defRPr sz="1900" b="0">
                 <a:solidFill>
                   <a:srgbClr val="37474F"/>
                 </a:solidFill>
@@ -22979,7 +23974,7 @@
           <a:lstStyle/>
           <a:p>
             <a:pPr>
-              <a:defRPr sz="2800" b="1">
+              <a:defRPr sz="3000" b="1">
                 <a:solidFill>
                   <a:srgbClr val="0D2B45"/>
                 </a:solidFill>
@@ -23001,7 +23996,7 @@
         <p:spPr>
           <a:xfrm>
             <a:off x="502920" y="1344168"/>
-            <a:ext cx="11155680" cy="1371600"/>
+            <a:ext cx="11155680" cy="5010912"/>
           </a:xfrm>
           <a:prstGeom prst="roundRect">
             <a:avLst/>
@@ -23046,7 +24041,7 @@
         <p:spPr>
           <a:xfrm>
             <a:off x="777240" y="1463040"/>
-            <a:ext cx="10424160" cy="1188720"/>
+            <a:ext cx="10424160" cy="4782312"/>
           </a:xfrm>
           <a:prstGeom prst="rect">
             <a:avLst/>
@@ -23066,7 +24061,7 @@
               <a:spcAft>
                 <a:spcPts val="800"/>
               </a:spcAft>
-              <a:defRPr sz="1300" b="0">
+              <a:defRPr sz="1400" b="0">
                 <a:solidFill>
                   <a:srgbClr val="0D2B45"/>
                 </a:solidFill>
@@ -23085,7 +24080,7 @@
               <a:spcAft>
                 <a:spcPts val="800"/>
               </a:spcAft>
-              <a:defRPr sz="1700" b="0">
+              <a:defRPr sz="1900" b="0">
                 <a:solidFill>
                   <a:srgbClr val="37474F"/>
                 </a:solidFill>
@@ -23269,7 +24264,7 @@
           <a:lstStyle/>
           <a:p>
             <a:pPr>
-              <a:defRPr sz="2800" b="1">
+              <a:defRPr sz="3000" b="1">
                 <a:solidFill>
                   <a:srgbClr val="0D2B45"/>
                 </a:solidFill>
@@ -23291,7 +24286,7 @@
         <p:spPr>
           <a:xfrm>
             <a:off x="502920" y="1344168"/>
-            <a:ext cx="11155680" cy="2651759"/>
+            <a:ext cx="11155680" cy="5010912"/>
           </a:xfrm>
           <a:prstGeom prst="roundRect">
             <a:avLst/>
@@ -23336,7 +24331,7 @@
         <p:spPr>
           <a:xfrm>
             <a:off x="777240" y="1463040"/>
-            <a:ext cx="10424160" cy="2468879"/>
+            <a:ext cx="10424160" cy="4782312"/>
           </a:xfrm>
           <a:prstGeom prst="rect">
             <a:avLst/>
@@ -23688,7 +24683,7 @@
           <a:lstStyle/>
           <a:p>
             <a:pPr algn="r">
-              <a:defRPr sz="1000" b="0">
+              <a:defRPr sz="1100" b="0">
                 <a:solidFill>
                   <a:srgbClr val="78909C"/>
                 </a:solidFill>
@@ -23724,7 +24719,7 @@
           <a:lstStyle/>
           <a:p>
             <a:pPr>
-              <a:defRPr sz="2400" b="1">
+              <a:defRPr sz="2600" b="1">
                 <a:solidFill>
                   <a:srgbClr val="0D2B45"/>
                 </a:solidFill>
@@ -23746,7 +24741,7 @@
         <p:spPr>
           <a:xfrm>
             <a:off x="502920" y="1554480"/>
-            <a:ext cx="11155680" cy="2651759"/>
+            <a:ext cx="11155680" cy="4800600"/>
           </a:xfrm>
           <a:prstGeom prst="roundRect">
             <a:avLst/>
@@ -23791,7 +24786,7 @@
         <p:spPr>
           <a:xfrm>
             <a:off x="777240" y="1673352"/>
-            <a:ext cx="10424160" cy="2468879"/>
+            <a:ext cx="10424160" cy="4572000"/>
           </a:xfrm>
           <a:prstGeom prst="rect">
             <a:avLst/>
@@ -23811,7 +24806,7 @@
               <a:spcAft>
                 <a:spcPts val="500"/>
               </a:spcAft>
-              <a:defRPr sz="1500" b="0">
+              <a:defRPr sz="1600" b="0">
                 <a:solidFill>
                   <a:srgbClr val="37474F"/>
                 </a:solidFill>
@@ -23830,7 +24825,7 @@
               <a:spcAft>
                 <a:spcPts val="500"/>
               </a:spcAft>
-              <a:defRPr sz="1500" b="0">
+              <a:defRPr sz="1600" b="0">
                 <a:solidFill>
                   <a:srgbClr val="37474F"/>
                 </a:solidFill>
@@ -23849,7 +24844,7 @@
               <a:spcAft>
                 <a:spcPts val="500"/>
               </a:spcAft>
-              <a:defRPr sz="1500" b="0">
+              <a:defRPr sz="1600" b="0">
                 <a:solidFill>
                   <a:srgbClr val="37474F"/>
                 </a:solidFill>
@@ -23868,7 +24863,7 @@
               <a:spcAft>
                 <a:spcPts val="500"/>
               </a:spcAft>
-              <a:defRPr sz="1500" b="0">
+              <a:defRPr sz="1600" b="0">
                 <a:solidFill>
                   <a:srgbClr val="37474F"/>
                 </a:solidFill>
@@ -23887,7 +24882,7 @@
               <a:spcAft>
                 <a:spcPts val="500"/>
               </a:spcAft>
-              <a:defRPr sz="1500" b="0">
+              <a:defRPr sz="1600" b="0">
                 <a:solidFill>
                   <a:srgbClr val="37474F"/>
                 </a:solidFill>
@@ -23906,7 +24901,7 @@
               <a:spcAft>
                 <a:spcPts val="500"/>
               </a:spcAft>
-              <a:defRPr sz="1500" b="0">
+              <a:defRPr sz="1600" b="0">
                 <a:solidFill>
                   <a:srgbClr val="37474F"/>
                 </a:solidFill>
@@ -24179,7 +25174,7 @@
           <a:lstStyle/>
           <a:p>
             <a:pPr algn="r">
-              <a:defRPr sz="1000" b="0">
+              <a:defRPr sz="1100" b="0">
                 <a:solidFill>
                   <a:srgbClr val="78909C"/>
                 </a:solidFill>
@@ -24215,7 +25210,7 @@
           <a:lstStyle/>
           <a:p>
             <a:pPr>
-              <a:defRPr sz="2400" b="1">
+              <a:defRPr sz="2600" b="1">
                 <a:solidFill>
                   <a:srgbClr val="0D2B45"/>
                 </a:solidFill>
@@ -24237,7 +25232,7 @@
         <p:spPr>
           <a:xfrm>
             <a:off x="502920" y="1554480"/>
-            <a:ext cx="11155680" cy="2651759"/>
+            <a:ext cx="11155680" cy="4800600"/>
           </a:xfrm>
           <a:prstGeom prst="roundRect">
             <a:avLst/>
@@ -24282,7 +25277,7 @@
         <p:spPr>
           <a:xfrm>
             <a:off x="777240" y="1673352"/>
-            <a:ext cx="10424160" cy="2468879"/>
+            <a:ext cx="10424160" cy="4572000"/>
           </a:xfrm>
           <a:prstGeom prst="rect">
             <a:avLst/>
@@ -24302,7 +25297,7 @@
               <a:spcAft>
                 <a:spcPts val="500"/>
               </a:spcAft>
-              <a:defRPr sz="1500" b="0">
+              <a:defRPr sz="1600" b="0">
                 <a:solidFill>
                   <a:srgbClr val="37474F"/>
                 </a:solidFill>
@@ -24321,7 +25316,7 @@
               <a:spcAft>
                 <a:spcPts val="500"/>
               </a:spcAft>
-              <a:defRPr sz="1500" b="0">
+              <a:defRPr sz="1600" b="0">
                 <a:solidFill>
                   <a:srgbClr val="37474F"/>
                 </a:solidFill>
@@ -24340,7 +25335,7 @@
               <a:spcAft>
                 <a:spcPts val="500"/>
               </a:spcAft>
-              <a:defRPr sz="1500" b="0">
+              <a:defRPr sz="1600" b="0">
                 <a:solidFill>
                   <a:srgbClr val="37474F"/>
                 </a:solidFill>
@@ -24359,7 +25354,7 @@
               <a:spcAft>
                 <a:spcPts val="500"/>
               </a:spcAft>
-              <a:defRPr sz="1500" b="0">
+              <a:defRPr sz="1600" b="0">
                 <a:solidFill>
                   <a:srgbClr val="37474F"/>
                 </a:solidFill>
@@ -24378,7 +25373,7 @@
               <a:spcAft>
                 <a:spcPts val="500"/>
               </a:spcAft>
-              <a:defRPr sz="1500" b="0">
+              <a:defRPr sz="1600" b="0">
                 <a:solidFill>
                   <a:srgbClr val="37474F"/>
                 </a:solidFill>
@@ -24397,7 +25392,7 @@
               <a:spcAft>
                 <a:spcPts val="500"/>
               </a:spcAft>
-              <a:defRPr sz="1500" b="0">
+              <a:defRPr sz="1600" b="0">
                 <a:solidFill>
                   <a:srgbClr val="37474F"/>
                 </a:solidFill>
@@ -24670,7 +25665,7 @@
           <a:lstStyle/>
           <a:p>
             <a:pPr algn="r">
-              <a:defRPr sz="1000" b="0">
+              <a:defRPr sz="1100" b="0">
                 <a:solidFill>
                   <a:srgbClr val="78909C"/>
                 </a:solidFill>
@@ -24706,7 +25701,7 @@
           <a:lstStyle/>
           <a:p>
             <a:pPr>
-              <a:defRPr sz="2400" b="1">
+              <a:defRPr sz="2600" b="1">
                 <a:solidFill>
                   <a:srgbClr val="0D2B45"/>
                 </a:solidFill>
@@ -24728,7 +25723,7 @@
         <p:spPr>
           <a:xfrm>
             <a:off x="502920" y="1554480"/>
-            <a:ext cx="11155680" cy="2651759"/>
+            <a:ext cx="11155680" cy="4800600"/>
           </a:xfrm>
           <a:prstGeom prst="roundRect">
             <a:avLst/>
@@ -24773,7 +25768,7 @@
         <p:spPr>
           <a:xfrm>
             <a:off x="777240" y="1673352"/>
-            <a:ext cx="10424160" cy="2468879"/>
+            <a:ext cx="10424160" cy="4572000"/>
           </a:xfrm>
           <a:prstGeom prst="rect">
             <a:avLst/>
@@ -24793,7 +25788,7 @@
               <a:spcAft>
                 <a:spcPts val="500"/>
               </a:spcAft>
-              <a:defRPr sz="1500" b="0">
+              <a:defRPr sz="1600" b="0">
                 <a:solidFill>
                   <a:srgbClr val="37474F"/>
                 </a:solidFill>
@@ -24812,7 +25807,7 @@
               <a:spcAft>
                 <a:spcPts val="500"/>
               </a:spcAft>
-              <a:defRPr sz="1500" b="0">
+              <a:defRPr sz="1600" b="0">
                 <a:solidFill>
                   <a:srgbClr val="37474F"/>
                 </a:solidFill>
@@ -24831,7 +25826,7 @@
               <a:spcAft>
                 <a:spcPts val="500"/>
               </a:spcAft>
-              <a:defRPr sz="1500" b="0">
+              <a:defRPr sz="1600" b="0">
                 <a:solidFill>
                   <a:srgbClr val="37474F"/>
                 </a:solidFill>
@@ -24850,7 +25845,7 @@
               <a:spcAft>
                 <a:spcPts val="500"/>
               </a:spcAft>
-              <a:defRPr sz="1500" b="0">
+              <a:defRPr sz="1600" b="0">
                 <a:solidFill>
                   <a:srgbClr val="37474F"/>
                 </a:solidFill>
@@ -24869,7 +25864,7 @@
               <a:spcAft>
                 <a:spcPts val="500"/>
               </a:spcAft>
-              <a:defRPr sz="1500" b="0">
+              <a:defRPr sz="1600" b="0">
                 <a:solidFill>
                   <a:srgbClr val="37474F"/>
                 </a:solidFill>
@@ -24888,7 +25883,7 @@
               <a:spcAft>
                 <a:spcPts val="500"/>
               </a:spcAft>
-              <a:defRPr sz="1500" b="0">
+              <a:defRPr sz="1600" b="0">
                 <a:solidFill>
                   <a:srgbClr val="37474F"/>
                 </a:solidFill>
@@ -25161,7 +26156,7 @@
           <a:lstStyle/>
           <a:p>
             <a:pPr algn="r">
-              <a:defRPr sz="1000" b="0">
+              <a:defRPr sz="1100" b="0">
                 <a:solidFill>
                   <a:srgbClr val="78909C"/>
                 </a:solidFill>
@@ -25197,7 +26192,7 @@
           <a:lstStyle/>
           <a:p>
             <a:pPr>
-              <a:defRPr sz="2400" b="1">
+              <a:defRPr sz="2600" b="1">
                 <a:solidFill>
                   <a:srgbClr val="0D2B45"/>
                 </a:solidFill>
@@ -25219,7 +26214,7 @@
         <p:spPr>
           <a:xfrm>
             <a:off x="502920" y="1554480"/>
-            <a:ext cx="11155680" cy="2651759"/>
+            <a:ext cx="11155680" cy="4800600"/>
           </a:xfrm>
           <a:prstGeom prst="roundRect">
             <a:avLst/>
@@ -25264,7 +26259,7 @@
         <p:spPr>
           <a:xfrm>
             <a:off x="777240" y="1673352"/>
-            <a:ext cx="10424160" cy="2468879"/>
+            <a:ext cx="10424160" cy="4572000"/>
           </a:xfrm>
           <a:prstGeom prst="rect">
             <a:avLst/>
@@ -25284,7 +26279,7 @@
               <a:spcAft>
                 <a:spcPts val="500"/>
               </a:spcAft>
-              <a:defRPr sz="1500" b="0">
+              <a:defRPr sz="1600" b="0">
                 <a:solidFill>
                   <a:srgbClr val="37474F"/>
                 </a:solidFill>
@@ -25303,7 +26298,7 @@
               <a:spcAft>
                 <a:spcPts val="500"/>
               </a:spcAft>
-              <a:defRPr sz="1500" b="0">
+              <a:defRPr sz="1600" b="0">
                 <a:solidFill>
                   <a:srgbClr val="37474F"/>
                 </a:solidFill>
@@ -25322,7 +26317,7 @@
               <a:spcAft>
                 <a:spcPts val="500"/>
               </a:spcAft>
-              <a:defRPr sz="1500" b="0">
+              <a:defRPr sz="1600" b="0">
                 <a:solidFill>
                   <a:srgbClr val="37474F"/>
                 </a:solidFill>
@@ -25341,7 +26336,7 @@
               <a:spcAft>
                 <a:spcPts val="500"/>
               </a:spcAft>
-              <a:defRPr sz="1500" b="0">
+              <a:defRPr sz="1600" b="0">
                 <a:solidFill>
                   <a:srgbClr val="37474F"/>
                 </a:solidFill>
@@ -25360,7 +26355,7 @@
               <a:spcAft>
                 <a:spcPts val="500"/>
               </a:spcAft>
-              <a:defRPr sz="1500" b="0">
+              <a:defRPr sz="1600" b="0">
                 <a:solidFill>
                   <a:srgbClr val="37474F"/>
                 </a:solidFill>
@@ -25379,7 +26374,7 @@
               <a:spcAft>
                 <a:spcPts val="500"/>
               </a:spcAft>
-              <a:defRPr sz="1500" b="0">
+              <a:defRPr sz="1600" b="0">
                 <a:solidFill>
                   <a:srgbClr val="37474F"/>
                 </a:solidFill>
@@ -25652,7 +26647,7 @@
           <a:lstStyle/>
           <a:p>
             <a:pPr algn="r">
-              <a:defRPr sz="1000" b="0">
+              <a:defRPr sz="1100" b="0">
                 <a:solidFill>
                   <a:srgbClr val="78909C"/>
                 </a:solidFill>
@@ -25688,7 +26683,7 @@
           <a:lstStyle/>
           <a:p>
             <a:pPr>
-              <a:defRPr sz="2400" b="1">
+              <a:defRPr sz="2600" b="1">
                 <a:solidFill>
                   <a:srgbClr val="0D2B45"/>
                 </a:solidFill>
@@ -25710,7 +26705,7 @@
         <p:spPr>
           <a:xfrm>
             <a:off x="502920" y="1554480"/>
-            <a:ext cx="11155680" cy="2651759"/>
+            <a:ext cx="11155680" cy="4800600"/>
           </a:xfrm>
           <a:prstGeom prst="roundRect">
             <a:avLst/>
@@ -25755,7 +26750,7 @@
         <p:spPr>
           <a:xfrm>
             <a:off x="777240" y="1673352"/>
-            <a:ext cx="10424160" cy="2468879"/>
+            <a:ext cx="10424160" cy="4572000"/>
           </a:xfrm>
           <a:prstGeom prst="rect">
             <a:avLst/>
@@ -25775,7 +26770,7 @@
               <a:spcAft>
                 <a:spcPts val="500"/>
               </a:spcAft>
-              <a:defRPr sz="1500" b="0">
+              <a:defRPr sz="1600" b="0">
                 <a:solidFill>
                   <a:srgbClr val="37474F"/>
                 </a:solidFill>
@@ -25794,7 +26789,7 @@
               <a:spcAft>
                 <a:spcPts val="500"/>
               </a:spcAft>
-              <a:defRPr sz="1500" b="0">
+              <a:defRPr sz="1600" b="0">
                 <a:solidFill>
                   <a:srgbClr val="37474F"/>
                 </a:solidFill>
@@ -25813,7 +26808,7 @@
               <a:spcAft>
                 <a:spcPts val="500"/>
               </a:spcAft>
-              <a:defRPr sz="1500" b="0">
+              <a:defRPr sz="1600" b="0">
                 <a:solidFill>
                   <a:srgbClr val="37474F"/>
                 </a:solidFill>
@@ -25832,7 +26827,7 @@
               <a:spcAft>
                 <a:spcPts val="500"/>
               </a:spcAft>
-              <a:defRPr sz="1500" b="0">
+              <a:defRPr sz="1600" b="0">
                 <a:solidFill>
                   <a:srgbClr val="37474F"/>
                 </a:solidFill>
@@ -25851,7 +26846,7 @@
               <a:spcAft>
                 <a:spcPts val="500"/>
               </a:spcAft>
-              <a:defRPr sz="1500" b="0">
+              <a:defRPr sz="1600" b="0">
                 <a:solidFill>
                   <a:srgbClr val="37474F"/>
                 </a:solidFill>
@@ -25870,7 +26865,7 @@
               <a:spcAft>
                 <a:spcPts val="500"/>
               </a:spcAft>
-              <a:defRPr sz="1500" b="0">
+              <a:defRPr sz="1600" b="0">
                 <a:solidFill>
                   <a:srgbClr val="37474F"/>
                 </a:solidFill>
